--- a/Monamu_Slides.pptx
+++ b/Monamu_Slides.pptx
@@ -8,25 +8,35 @@
     <p:sldId id="256" r:id="rId6"/>
     <p:sldId id="257" r:id="rId7"/>
     <p:sldId id="258" r:id="rId8"/>
+    <p:sldId id="259" r:id="rId9"/>
+    <p:sldId id="260" r:id="rId10"/>
+    <p:sldId id="261" r:id="rId11"/>
+    <p:sldId id="262" r:id="rId12"/>
+    <p:sldId id="263" r:id="rId13"/>
+    <p:sldId id="264" r:id="rId14"/>
+    <p:sldId id="265" r:id="rId15"/>
+    <p:sldId id="266" r:id="rId16"/>
+    <p:sldId id="267" r:id="rId17"/>
+    <p:sldId id="268" r:id="rId18"/>
   </p:sldIdLst>
   <p:sldSz cx="18288000" cy="10287000"/>
   <p:notesSz cx="6858000" cy="9144000"/>
   <p:embeddedFontLst>
     <p:embeddedFont>
       <p:font typeface="Open Sans Bold" charset="1" panose="020B0806030504020204"/>
-      <p:regular r:id="rId9"/>
+      <p:regular r:id="rId19"/>
     </p:embeddedFont>
     <p:embeddedFont>
       <p:font typeface="Open Sans" charset="1" panose="020B0606030504020204"/>
-      <p:regular r:id="rId10"/>
+      <p:regular r:id="rId20"/>
     </p:embeddedFont>
     <p:embeddedFont>
       <p:font typeface="Bree Serif" charset="1" panose="02000503040000020004"/>
-      <p:regular r:id="rId11"/>
+      <p:regular r:id="rId21"/>
     </p:embeddedFont>
     <p:embeddedFont>
       <p:font typeface="Arimo Bold" charset="1" panose="020B0704020202020204"/>
-      <p:regular r:id="rId12"/>
+      <p:regular r:id="rId22"/>
     </p:embeddedFont>
   </p:embeddedFontLst>
   <p:defaultTextStyle>
@@ -3238,6 +3248,1038 @@
 </p:sld>
 </file>
 
+<file path=ppt/slides/slide10.xml><?xml version="1.0" encoding="utf-8"?>
+<p:sld xmlns:p="http://schemas.openxmlformats.org/presentationml/2006/main" xmlns:a="http://schemas.openxmlformats.org/drawingml/2006/main" xmlns:r="http://schemas.openxmlformats.org/officeDocument/2006/relationships">
+  <p:cSld>
+    <p:bg>
+      <p:bgPr>
+        <a:solidFill>
+          <a:srgbClr val="569076"/>
+        </a:solidFill>
+      </p:bgPr>
+    </p:bg>
+    <p:spTree>
+      <p:nvGrpSpPr>
+        <p:cNvPr id="1" name=""/>
+        <p:cNvGrpSpPr/>
+        <p:nvPr/>
+      </p:nvGrpSpPr>
+      <p:grpSpPr>
+        <a:xfrm>
+          <a:off x="0" y="0"/>
+          <a:ext cx="0" cy="0"/>
+          <a:chOff x="0" y="0"/>
+          <a:chExt cx="0" cy="0"/>
+        </a:xfrm>
+      </p:grpSpPr>
+      <p:sp>
+        <p:nvSpPr>
+          <p:cNvPr name="AutoShape 2" id="2"/>
+          <p:cNvSpPr/>
+          <p:nvPr/>
+        </p:nvSpPr>
+        <p:spPr>
+          <a:xfrm>
+            <a:off x="1028700" y="1969856"/>
+            <a:ext cx="16230600" cy="0"/>
+          </a:xfrm>
+          <a:prstGeom prst="line">
+            <a:avLst/>
+          </a:prstGeom>
+          <a:ln cap="flat" w="9525">
+            <a:solidFill>
+              <a:srgbClr val="000000"/>
+            </a:solidFill>
+            <a:prstDash val="solid"/>
+            <a:headEnd type="none" len="sm" w="sm"/>
+            <a:tailEnd type="none" len="sm" w="sm"/>
+          </a:ln>
+        </p:spPr>
+      </p:sp>
+      <p:sp>
+        <p:nvSpPr>
+          <p:cNvPr name="Freeform 3" id="3"/>
+          <p:cNvSpPr/>
+          <p:nvPr/>
+        </p:nvSpPr>
+        <p:spPr>
+          <a:xfrm flipH="false" flipV="false" rot="0">
+            <a:off x="1938926" y="315454"/>
+            <a:ext cx="1700737" cy="1426493"/>
+          </a:xfrm>
+          <a:custGeom>
+            <a:avLst/>
+            <a:gdLst/>
+            <a:ahLst/>
+            <a:cxnLst/>
+            <a:rect r="r" b="b" t="t" l="l"/>
+            <a:pathLst>
+              <a:path h="1426493" w="1700737">
+                <a:moveTo>
+                  <a:pt x="0" y="0"/>
+                </a:moveTo>
+                <a:lnTo>
+                  <a:pt x="1700737" y="0"/>
+                </a:lnTo>
+                <a:lnTo>
+                  <a:pt x="1700737" y="1426492"/>
+                </a:lnTo>
+                <a:lnTo>
+                  <a:pt x="0" y="1426492"/>
+                </a:lnTo>
+                <a:lnTo>
+                  <a:pt x="0" y="0"/>
+                </a:lnTo>
+                <a:close/>
+              </a:path>
+            </a:pathLst>
+          </a:custGeom>
+          <a:blipFill>
+            <a:blip r:embed="rId2"/>
+            <a:stretch>
+              <a:fillRect l="0" t="0" r="0" b="0"/>
+            </a:stretch>
+          </a:blipFill>
+        </p:spPr>
+      </p:sp>
+      <p:sp>
+        <p:nvSpPr>
+          <p:cNvPr name="Freeform 4" id="4"/>
+          <p:cNvSpPr/>
+          <p:nvPr/>
+        </p:nvSpPr>
+        <p:spPr>
+          <a:xfrm flipH="false" flipV="false" rot="0">
+            <a:off x="2932165" y="3058484"/>
+            <a:ext cx="12855703" cy="1205222"/>
+          </a:xfrm>
+          <a:custGeom>
+            <a:avLst/>
+            <a:gdLst/>
+            <a:ahLst/>
+            <a:cxnLst/>
+            <a:rect r="r" b="b" t="t" l="l"/>
+            <a:pathLst>
+              <a:path h="1205222" w="12855703">
+                <a:moveTo>
+                  <a:pt x="0" y="0"/>
+                </a:moveTo>
+                <a:lnTo>
+                  <a:pt x="12855703" y="0"/>
+                </a:lnTo>
+                <a:lnTo>
+                  <a:pt x="12855703" y="1205222"/>
+                </a:lnTo>
+                <a:lnTo>
+                  <a:pt x="0" y="1205222"/>
+                </a:lnTo>
+                <a:lnTo>
+                  <a:pt x="0" y="0"/>
+                </a:lnTo>
+                <a:close/>
+              </a:path>
+            </a:pathLst>
+          </a:custGeom>
+          <a:blipFill>
+            <a:blip r:embed="rId3"/>
+            <a:stretch>
+              <a:fillRect l="0" t="0" r="0" b="0"/>
+            </a:stretch>
+          </a:blipFill>
+        </p:spPr>
+      </p:sp>
+      <p:sp>
+        <p:nvSpPr>
+          <p:cNvPr name="Freeform 5" id="5"/>
+          <p:cNvSpPr/>
+          <p:nvPr/>
+        </p:nvSpPr>
+        <p:spPr>
+          <a:xfrm flipH="false" flipV="false" rot="0">
+            <a:off x="2932165" y="4263706"/>
+            <a:ext cx="12855703" cy="3647806"/>
+          </a:xfrm>
+          <a:custGeom>
+            <a:avLst/>
+            <a:gdLst/>
+            <a:ahLst/>
+            <a:cxnLst/>
+            <a:rect r="r" b="b" t="t" l="l"/>
+            <a:pathLst>
+              <a:path h="3647806" w="12855703">
+                <a:moveTo>
+                  <a:pt x="0" y="0"/>
+                </a:moveTo>
+                <a:lnTo>
+                  <a:pt x="12855703" y="0"/>
+                </a:lnTo>
+                <a:lnTo>
+                  <a:pt x="12855703" y="3647806"/>
+                </a:lnTo>
+                <a:lnTo>
+                  <a:pt x="0" y="3647806"/>
+                </a:lnTo>
+                <a:lnTo>
+                  <a:pt x="0" y="0"/>
+                </a:lnTo>
+                <a:close/>
+              </a:path>
+            </a:pathLst>
+          </a:custGeom>
+          <a:blipFill>
+            <a:blip r:embed="rId4"/>
+            <a:stretch>
+              <a:fillRect l="0" t="0" r="0" b="0"/>
+            </a:stretch>
+          </a:blipFill>
+        </p:spPr>
+      </p:sp>
+      <p:sp>
+        <p:nvSpPr>
+          <p:cNvPr name="Freeform 6" id="6"/>
+          <p:cNvSpPr/>
+          <p:nvPr/>
+        </p:nvSpPr>
+        <p:spPr>
+          <a:xfrm flipH="false" flipV="false" rot="0">
+            <a:off x="2932165" y="7911512"/>
+            <a:ext cx="12855703" cy="401741"/>
+          </a:xfrm>
+          <a:custGeom>
+            <a:avLst/>
+            <a:gdLst/>
+            <a:ahLst/>
+            <a:cxnLst/>
+            <a:rect r="r" b="b" t="t" l="l"/>
+            <a:pathLst>
+              <a:path h="401741" w="12855703">
+                <a:moveTo>
+                  <a:pt x="0" y="0"/>
+                </a:moveTo>
+                <a:lnTo>
+                  <a:pt x="12855703" y="0"/>
+                </a:lnTo>
+                <a:lnTo>
+                  <a:pt x="12855703" y="401741"/>
+                </a:lnTo>
+                <a:lnTo>
+                  <a:pt x="0" y="401741"/>
+                </a:lnTo>
+                <a:lnTo>
+                  <a:pt x="0" y="0"/>
+                </a:lnTo>
+                <a:close/>
+              </a:path>
+            </a:pathLst>
+          </a:custGeom>
+          <a:blipFill>
+            <a:blip r:embed="rId5"/>
+            <a:stretch>
+              <a:fillRect l="0" t="0" r="0" b="0"/>
+            </a:stretch>
+          </a:blipFill>
+        </p:spPr>
+      </p:sp>
+      <p:sp>
+        <p:nvSpPr>
+          <p:cNvPr name="TextBox 7" id="7"/>
+          <p:cNvSpPr txBox="true"/>
+          <p:nvPr/>
+        </p:nvSpPr>
+        <p:spPr>
+          <a:xfrm rot="0">
+            <a:off x="2789295" y="528002"/>
+            <a:ext cx="8412553" cy="896620"/>
+          </a:xfrm>
+          <a:prstGeom prst="rect">
+            <a:avLst/>
+          </a:prstGeom>
+        </p:spPr>
+        <p:txBody>
+          <a:bodyPr anchor="t" rtlCol="false" tIns="0" lIns="0" bIns="0" rIns="0">
+            <a:spAutoFit/>
+          </a:bodyPr>
+          <a:lstStyle/>
+          <a:p>
+            <a:pPr algn="ctr">
+              <a:lnSpc>
+                <a:spcPts val="7279"/>
+              </a:lnSpc>
+            </a:pPr>
+            <a:r>
+              <a:rPr lang="en-US" sz="5199">
+                <a:solidFill>
+                  <a:srgbClr val="000000"/>
+                </a:solidFill>
+                <a:latin typeface="Bree Serif"/>
+                <a:ea typeface="Bree Serif"/>
+                <a:cs typeface="Bree Serif"/>
+                <a:sym typeface="Bree Serif"/>
+              </a:rPr>
+              <a:t>Tabelas - Item Venda</a:t>
+            </a:r>
+          </a:p>
+        </p:txBody>
+      </p:sp>
+    </p:spTree>
+  </p:cSld>
+  <p:clrMapOvr>
+    <a:masterClrMapping/>
+  </p:clrMapOvr>
+</p:sld>
+</file>
+
+<file path=ppt/slides/slide11.xml><?xml version="1.0" encoding="utf-8"?>
+<p:sld xmlns:p="http://schemas.openxmlformats.org/presentationml/2006/main" xmlns:a="http://schemas.openxmlformats.org/drawingml/2006/main" xmlns:r="http://schemas.openxmlformats.org/officeDocument/2006/relationships">
+  <p:cSld>
+    <p:bg>
+      <p:bgPr>
+        <a:solidFill>
+          <a:srgbClr val="569076"/>
+        </a:solidFill>
+      </p:bgPr>
+    </p:bg>
+    <p:spTree>
+      <p:nvGrpSpPr>
+        <p:cNvPr id="1" name=""/>
+        <p:cNvGrpSpPr/>
+        <p:nvPr/>
+      </p:nvGrpSpPr>
+      <p:grpSpPr>
+        <a:xfrm>
+          <a:off x="0" y="0"/>
+          <a:ext cx="0" cy="0"/>
+          <a:chOff x="0" y="0"/>
+          <a:chExt cx="0" cy="0"/>
+        </a:xfrm>
+      </p:grpSpPr>
+      <p:sp>
+        <p:nvSpPr>
+          <p:cNvPr name="AutoShape 2" id="2"/>
+          <p:cNvSpPr/>
+          <p:nvPr/>
+        </p:nvSpPr>
+        <p:spPr>
+          <a:xfrm>
+            <a:off x="1028700" y="1969856"/>
+            <a:ext cx="16230600" cy="0"/>
+          </a:xfrm>
+          <a:prstGeom prst="line">
+            <a:avLst/>
+          </a:prstGeom>
+          <a:ln cap="flat" w="9525">
+            <a:solidFill>
+              <a:srgbClr val="000000"/>
+            </a:solidFill>
+            <a:prstDash val="solid"/>
+            <a:headEnd type="none" len="sm" w="sm"/>
+            <a:tailEnd type="none" len="sm" w="sm"/>
+          </a:ln>
+        </p:spPr>
+      </p:sp>
+      <p:sp>
+        <p:nvSpPr>
+          <p:cNvPr name="Freeform 3" id="3"/>
+          <p:cNvSpPr/>
+          <p:nvPr/>
+        </p:nvSpPr>
+        <p:spPr>
+          <a:xfrm flipH="false" flipV="false" rot="0">
+            <a:off x="1938926" y="315454"/>
+            <a:ext cx="1700737" cy="1426493"/>
+          </a:xfrm>
+          <a:custGeom>
+            <a:avLst/>
+            <a:gdLst/>
+            <a:ahLst/>
+            <a:cxnLst/>
+            <a:rect r="r" b="b" t="t" l="l"/>
+            <a:pathLst>
+              <a:path h="1426493" w="1700737">
+                <a:moveTo>
+                  <a:pt x="0" y="0"/>
+                </a:moveTo>
+                <a:lnTo>
+                  <a:pt x="1700737" y="0"/>
+                </a:lnTo>
+                <a:lnTo>
+                  <a:pt x="1700737" y="1426492"/>
+                </a:lnTo>
+                <a:lnTo>
+                  <a:pt x="0" y="1426492"/>
+                </a:lnTo>
+                <a:lnTo>
+                  <a:pt x="0" y="0"/>
+                </a:lnTo>
+                <a:close/>
+              </a:path>
+            </a:pathLst>
+          </a:custGeom>
+          <a:blipFill>
+            <a:blip r:embed="rId2"/>
+            <a:stretch>
+              <a:fillRect l="0" t="0" r="0" b="0"/>
+            </a:stretch>
+          </a:blipFill>
+        </p:spPr>
+      </p:sp>
+      <p:sp>
+        <p:nvSpPr>
+          <p:cNvPr name="Freeform 4" id="4"/>
+          <p:cNvSpPr/>
+          <p:nvPr/>
+        </p:nvSpPr>
+        <p:spPr>
+          <a:xfrm flipH="false" flipV="false" rot="0">
+            <a:off x="2932165" y="3058484"/>
+            <a:ext cx="12855703" cy="1205222"/>
+          </a:xfrm>
+          <a:custGeom>
+            <a:avLst/>
+            <a:gdLst/>
+            <a:ahLst/>
+            <a:cxnLst/>
+            <a:rect r="r" b="b" t="t" l="l"/>
+            <a:pathLst>
+              <a:path h="1205222" w="12855703">
+                <a:moveTo>
+                  <a:pt x="0" y="0"/>
+                </a:moveTo>
+                <a:lnTo>
+                  <a:pt x="12855703" y="0"/>
+                </a:lnTo>
+                <a:lnTo>
+                  <a:pt x="12855703" y="1205222"/>
+                </a:lnTo>
+                <a:lnTo>
+                  <a:pt x="0" y="1205222"/>
+                </a:lnTo>
+                <a:lnTo>
+                  <a:pt x="0" y="0"/>
+                </a:lnTo>
+                <a:close/>
+              </a:path>
+            </a:pathLst>
+          </a:custGeom>
+          <a:blipFill>
+            <a:blip r:embed="rId3"/>
+            <a:stretch>
+              <a:fillRect l="0" t="0" r="0" b="0"/>
+            </a:stretch>
+          </a:blipFill>
+        </p:spPr>
+      </p:sp>
+      <p:sp>
+        <p:nvSpPr>
+          <p:cNvPr name="Freeform 5" id="5"/>
+          <p:cNvSpPr/>
+          <p:nvPr/>
+        </p:nvSpPr>
+        <p:spPr>
+          <a:xfrm flipH="false" flipV="false" rot="0">
+            <a:off x="2932165" y="4263706"/>
+            <a:ext cx="12855703" cy="4338800"/>
+          </a:xfrm>
+          <a:custGeom>
+            <a:avLst/>
+            <a:gdLst/>
+            <a:ahLst/>
+            <a:cxnLst/>
+            <a:rect r="r" b="b" t="t" l="l"/>
+            <a:pathLst>
+              <a:path h="4338800" w="12855703">
+                <a:moveTo>
+                  <a:pt x="0" y="0"/>
+                </a:moveTo>
+                <a:lnTo>
+                  <a:pt x="12855703" y="0"/>
+                </a:lnTo>
+                <a:lnTo>
+                  <a:pt x="12855703" y="4338800"/>
+                </a:lnTo>
+                <a:lnTo>
+                  <a:pt x="0" y="4338800"/>
+                </a:lnTo>
+                <a:lnTo>
+                  <a:pt x="0" y="0"/>
+                </a:lnTo>
+                <a:close/>
+              </a:path>
+            </a:pathLst>
+          </a:custGeom>
+          <a:blipFill>
+            <a:blip r:embed="rId4"/>
+            <a:stretch>
+              <a:fillRect l="0" t="0" r="0" b="0"/>
+            </a:stretch>
+          </a:blipFill>
+        </p:spPr>
+      </p:sp>
+      <p:sp>
+        <p:nvSpPr>
+          <p:cNvPr name="TextBox 6" id="6"/>
+          <p:cNvSpPr txBox="true"/>
+          <p:nvPr/>
+        </p:nvSpPr>
+        <p:spPr>
+          <a:xfrm rot="0">
+            <a:off x="2789295" y="528002"/>
+            <a:ext cx="6570722" cy="896620"/>
+          </a:xfrm>
+          <a:prstGeom prst="rect">
+            <a:avLst/>
+          </a:prstGeom>
+        </p:spPr>
+        <p:txBody>
+          <a:bodyPr anchor="t" rtlCol="false" tIns="0" lIns="0" bIns="0" rIns="0">
+            <a:spAutoFit/>
+          </a:bodyPr>
+          <a:lstStyle/>
+          <a:p>
+            <a:pPr algn="ctr">
+              <a:lnSpc>
+                <a:spcPts val="7279"/>
+              </a:lnSpc>
+            </a:pPr>
+            <a:r>
+              <a:rPr lang="en-US" sz="5199">
+                <a:solidFill>
+                  <a:srgbClr val="000000"/>
+                </a:solidFill>
+                <a:latin typeface="Bree Serif"/>
+                <a:ea typeface="Bree Serif"/>
+                <a:cs typeface="Bree Serif"/>
+                <a:sym typeface="Bree Serif"/>
+              </a:rPr>
+              <a:t>Tabelas - Loja</a:t>
+            </a:r>
+          </a:p>
+        </p:txBody>
+      </p:sp>
+    </p:spTree>
+  </p:cSld>
+  <p:clrMapOvr>
+    <a:masterClrMapping/>
+  </p:clrMapOvr>
+</p:sld>
+</file>
+
+<file path=ppt/slides/slide12.xml><?xml version="1.0" encoding="utf-8"?>
+<p:sld xmlns:p="http://schemas.openxmlformats.org/presentationml/2006/main" xmlns:a="http://schemas.openxmlformats.org/drawingml/2006/main" xmlns:r="http://schemas.openxmlformats.org/officeDocument/2006/relationships">
+  <p:cSld>
+    <p:bg>
+      <p:bgPr>
+        <a:solidFill>
+          <a:srgbClr val="569076"/>
+        </a:solidFill>
+      </p:bgPr>
+    </p:bg>
+    <p:spTree>
+      <p:nvGrpSpPr>
+        <p:cNvPr id="1" name=""/>
+        <p:cNvGrpSpPr/>
+        <p:nvPr/>
+      </p:nvGrpSpPr>
+      <p:grpSpPr>
+        <a:xfrm>
+          <a:off x="0" y="0"/>
+          <a:ext cx="0" cy="0"/>
+          <a:chOff x="0" y="0"/>
+          <a:chExt cx="0" cy="0"/>
+        </a:xfrm>
+      </p:grpSpPr>
+      <p:sp>
+        <p:nvSpPr>
+          <p:cNvPr name="AutoShape 2" id="2"/>
+          <p:cNvSpPr/>
+          <p:nvPr/>
+        </p:nvSpPr>
+        <p:spPr>
+          <a:xfrm>
+            <a:off x="1028700" y="1969856"/>
+            <a:ext cx="16230600" cy="0"/>
+          </a:xfrm>
+          <a:prstGeom prst="line">
+            <a:avLst/>
+          </a:prstGeom>
+          <a:ln cap="flat" w="9525">
+            <a:solidFill>
+              <a:srgbClr val="000000"/>
+            </a:solidFill>
+            <a:prstDash val="solid"/>
+            <a:headEnd type="none" len="sm" w="sm"/>
+            <a:tailEnd type="none" len="sm" w="sm"/>
+          </a:ln>
+        </p:spPr>
+      </p:sp>
+      <p:sp>
+        <p:nvSpPr>
+          <p:cNvPr name="Freeform 3" id="3"/>
+          <p:cNvSpPr/>
+          <p:nvPr/>
+        </p:nvSpPr>
+        <p:spPr>
+          <a:xfrm flipH="false" flipV="false" rot="0">
+            <a:off x="1938926" y="315454"/>
+            <a:ext cx="1700737" cy="1426493"/>
+          </a:xfrm>
+          <a:custGeom>
+            <a:avLst/>
+            <a:gdLst/>
+            <a:ahLst/>
+            <a:cxnLst/>
+            <a:rect r="r" b="b" t="t" l="l"/>
+            <a:pathLst>
+              <a:path h="1426493" w="1700737">
+                <a:moveTo>
+                  <a:pt x="0" y="0"/>
+                </a:moveTo>
+                <a:lnTo>
+                  <a:pt x="1700737" y="0"/>
+                </a:lnTo>
+                <a:lnTo>
+                  <a:pt x="1700737" y="1426492"/>
+                </a:lnTo>
+                <a:lnTo>
+                  <a:pt x="0" y="1426492"/>
+                </a:lnTo>
+                <a:lnTo>
+                  <a:pt x="0" y="0"/>
+                </a:lnTo>
+                <a:close/>
+              </a:path>
+            </a:pathLst>
+          </a:custGeom>
+          <a:blipFill>
+            <a:blip r:embed="rId2"/>
+            <a:stretch>
+              <a:fillRect l="0" t="0" r="0" b="0"/>
+            </a:stretch>
+          </a:blipFill>
+        </p:spPr>
+      </p:sp>
+      <p:sp>
+        <p:nvSpPr>
+          <p:cNvPr name="Freeform 4" id="4"/>
+          <p:cNvSpPr/>
+          <p:nvPr/>
+        </p:nvSpPr>
+        <p:spPr>
+          <a:xfrm flipH="false" flipV="false" rot="0">
+            <a:off x="4466643" y="2517544"/>
+            <a:ext cx="9354713" cy="877004"/>
+          </a:xfrm>
+          <a:custGeom>
+            <a:avLst/>
+            <a:gdLst/>
+            <a:ahLst/>
+            <a:cxnLst/>
+            <a:rect r="r" b="b" t="t" l="l"/>
+            <a:pathLst>
+              <a:path h="877004" w="9354713">
+                <a:moveTo>
+                  <a:pt x="0" y="0"/>
+                </a:moveTo>
+                <a:lnTo>
+                  <a:pt x="9354714" y="0"/>
+                </a:lnTo>
+                <a:lnTo>
+                  <a:pt x="9354714" y="877004"/>
+                </a:lnTo>
+                <a:lnTo>
+                  <a:pt x="0" y="877004"/>
+                </a:lnTo>
+                <a:lnTo>
+                  <a:pt x="0" y="0"/>
+                </a:lnTo>
+                <a:close/>
+              </a:path>
+            </a:pathLst>
+          </a:custGeom>
+          <a:blipFill>
+            <a:blip r:embed="rId3"/>
+            <a:stretch>
+              <a:fillRect l="0" t="0" r="0" b="0"/>
+            </a:stretch>
+          </a:blipFill>
+        </p:spPr>
+      </p:sp>
+      <p:sp>
+        <p:nvSpPr>
+          <p:cNvPr name="Freeform 5" id="5"/>
+          <p:cNvSpPr/>
+          <p:nvPr/>
+        </p:nvSpPr>
+        <p:spPr>
+          <a:xfrm flipH="false" flipV="false" rot="0">
+            <a:off x="4466643" y="3394548"/>
+            <a:ext cx="9354713" cy="6232578"/>
+          </a:xfrm>
+          <a:custGeom>
+            <a:avLst/>
+            <a:gdLst/>
+            <a:ahLst/>
+            <a:cxnLst/>
+            <a:rect r="r" b="b" t="t" l="l"/>
+            <a:pathLst>
+              <a:path h="6232578" w="9354713">
+                <a:moveTo>
+                  <a:pt x="0" y="0"/>
+                </a:moveTo>
+                <a:lnTo>
+                  <a:pt x="9354714" y="0"/>
+                </a:lnTo>
+                <a:lnTo>
+                  <a:pt x="9354714" y="6232578"/>
+                </a:lnTo>
+                <a:lnTo>
+                  <a:pt x="0" y="6232578"/>
+                </a:lnTo>
+                <a:lnTo>
+                  <a:pt x="0" y="0"/>
+                </a:lnTo>
+                <a:close/>
+              </a:path>
+            </a:pathLst>
+          </a:custGeom>
+          <a:blipFill>
+            <a:blip r:embed="rId4"/>
+            <a:stretch>
+              <a:fillRect l="0" t="0" r="0" b="0"/>
+            </a:stretch>
+          </a:blipFill>
+        </p:spPr>
+      </p:sp>
+      <p:sp>
+        <p:nvSpPr>
+          <p:cNvPr name="TextBox 6" id="6"/>
+          <p:cNvSpPr txBox="true"/>
+          <p:nvPr/>
+        </p:nvSpPr>
+        <p:spPr>
+          <a:xfrm rot="0">
+            <a:off x="2789295" y="528002"/>
+            <a:ext cx="7608503" cy="896620"/>
+          </a:xfrm>
+          <a:prstGeom prst="rect">
+            <a:avLst/>
+          </a:prstGeom>
+        </p:spPr>
+        <p:txBody>
+          <a:bodyPr anchor="t" rtlCol="false" tIns="0" lIns="0" bIns="0" rIns="0">
+            <a:spAutoFit/>
+          </a:bodyPr>
+          <a:lstStyle/>
+          <a:p>
+            <a:pPr algn="ctr">
+              <a:lnSpc>
+                <a:spcPts val="7279"/>
+              </a:lnSpc>
+            </a:pPr>
+            <a:r>
+              <a:rPr lang="en-US" sz="5199">
+                <a:solidFill>
+                  <a:srgbClr val="000000"/>
+                </a:solidFill>
+                <a:latin typeface="Bree Serif"/>
+                <a:ea typeface="Bree Serif"/>
+                <a:cs typeface="Bree Serif"/>
+                <a:sym typeface="Bree Serif"/>
+              </a:rPr>
+              <a:t>Tabelas - Produto</a:t>
+            </a:r>
+          </a:p>
+        </p:txBody>
+      </p:sp>
+    </p:spTree>
+  </p:cSld>
+  <p:clrMapOvr>
+    <a:masterClrMapping/>
+  </p:clrMapOvr>
+</p:sld>
+</file>
+
+<file path=ppt/slides/slide13.xml><?xml version="1.0" encoding="utf-8"?>
+<p:sld xmlns:p="http://schemas.openxmlformats.org/presentationml/2006/main" xmlns:a="http://schemas.openxmlformats.org/drawingml/2006/main" xmlns:r="http://schemas.openxmlformats.org/officeDocument/2006/relationships">
+  <p:cSld>
+    <p:bg>
+      <p:bgPr>
+        <a:solidFill>
+          <a:srgbClr val="569076"/>
+        </a:solidFill>
+      </p:bgPr>
+    </p:bg>
+    <p:spTree>
+      <p:nvGrpSpPr>
+        <p:cNvPr id="1" name=""/>
+        <p:cNvGrpSpPr/>
+        <p:nvPr/>
+      </p:nvGrpSpPr>
+      <p:grpSpPr>
+        <a:xfrm>
+          <a:off x="0" y="0"/>
+          <a:ext cx="0" cy="0"/>
+          <a:chOff x="0" y="0"/>
+          <a:chExt cx="0" cy="0"/>
+        </a:xfrm>
+      </p:grpSpPr>
+      <p:sp>
+        <p:nvSpPr>
+          <p:cNvPr name="AutoShape 2" id="2"/>
+          <p:cNvSpPr/>
+          <p:nvPr/>
+        </p:nvSpPr>
+        <p:spPr>
+          <a:xfrm>
+            <a:off x="1028700" y="1969856"/>
+            <a:ext cx="16230600" cy="0"/>
+          </a:xfrm>
+          <a:prstGeom prst="line">
+            <a:avLst/>
+          </a:prstGeom>
+          <a:ln cap="flat" w="9525">
+            <a:solidFill>
+              <a:srgbClr val="000000"/>
+            </a:solidFill>
+            <a:prstDash val="solid"/>
+            <a:headEnd type="none" len="sm" w="sm"/>
+            <a:tailEnd type="none" len="sm" w="sm"/>
+          </a:ln>
+        </p:spPr>
+      </p:sp>
+      <p:sp>
+        <p:nvSpPr>
+          <p:cNvPr name="Freeform 3" id="3"/>
+          <p:cNvSpPr/>
+          <p:nvPr/>
+        </p:nvSpPr>
+        <p:spPr>
+          <a:xfrm flipH="false" flipV="false" rot="0">
+            <a:off x="1938926" y="315454"/>
+            <a:ext cx="1700737" cy="1426493"/>
+          </a:xfrm>
+          <a:custGeom>
+            <a:avLst/>
+            <a:gdLst/>
+            <a:ahLst/>
+            <a:cxnLst/>
+            <a:rect r="r" b="b" t="t" l="l"/>
+            <a:pathLst>
+              <a:path h="1426493" w="1700737">
+                <a:moveTo>
+                  <a:pt x="0" y="0"/>
+                </a:moveTo>
+                <a:lnTo>
+                  <a:pt x="1700737" y="0"/>
+                </a:lnTo>
+                <a:lnTo>
+                  <a:pt x="1700737" y="1426492"/>
+                </a:lnTo>
+                <a:lnTo>
+                  <a:pt x="0" y="1426492"/>
+                </a:lnTo>
+                <a:lnTo>
+                  <a:pt x="0" y="0"/>
+                </a:lnTo>
+                <a:close/>
+              </a:path>
+            </a:pathLst>
+          </a:custGeom>
+          <a:blipFill>
+            <a:blip r:embed="rId2"/>
+            <a:stretch>
+              <a:fillRect l="0" t="0" r="0" b="0"/>
+            </a:stretch>
+          </a:blipFill>
+        </p:spPr>
+      </p:sp>
+      <p:sp>
+        <p:nvSpPr>
+          <p:cNvPr name="Freeform 4" id="4"/>
+          <p:cNvSpPr/>
+          <p:nvPr/>
+        </p:nvSpPr>
+        <p:spPr>
+          <a:xfrm flipH="false" flipV="false" rot="0">
+            <a:off x="2932165" y="2515559"/>
+            <a:ext cx="12855703" cy="1205222"/>
+          </a:xfrm>
+          <a:custGeom>
+            <a:avLst/>
+            <a:gdLst/>
+            <a:ahLst/>
+            <a:cxnLst/>
+            <a:rect r="r" b="b" t="t" l="l"/>
+            <a:pathLst>
+              <a:path h="1205222" w="12855703">
+                <a:moveTo>
+                  <a:pt x="0" y="0"/>
+                </a:moveTo>
+                <a:lnTo>
+                  <a:pt x="12855703" y="0"/>
+                </a:lnTo>
+                <a:lnTo>
+                  <a:pt x="12855703" y="1205222"/>
+                </a:lnTo>
+                <a:lnTo>
+                  <a:pt x="0" y="1205222"/>
+                </a:lnTo>
+                <a:lnTo>
+                  <a:pt x="0" y="0"/>
+                </a:lnTo>
+                <a:close/>
+              </a:path>
+            </a:pathLst>
+          </a:custGeom>
+          <a:blipFill>
+            <a:blip r:embed="rId3"/>
+            <a:stretch>
+              <a:fillRect l="0" t="0" r="0" b="0"/>
+            </a:stretch>
+          </a:blipFill>
+        </p:spPr>
+      </p:sp>
+      <p:sp>
+        <p:nvSpPr>
+          <p:cNvPr name="Freeform 5" id="5"/>
+          <p:cNvSpPr/>
+          <p:nvPr/>
+        </p:nvSpPr>
+        <p:spPr>
+          <a:xfrm flipH="false" flipV="false" rot="0">
+            <a:off x="2932165" y="3720781"/>
+            <a:ext cx="12855703" cy="5238699"/>
+          </a:xfrm>
+          <a:custGeom>
+            <a:avLst/>
+            <a:gdLst/>
+            <a:ahLst/>
+            <a:cxnLst/>
+            <a:rect r="r" b="b" t="t" l="l"/>
+            <a:pathLst>
+              <a:path h="5238699" w="12855703">
+                <a:moveTo>
+                  <a:pt x="0" y="0"/>
+                </a:moveTo>
+                <a:lnTo>
+                  <a:pt x="12855703" y="0"/>
+                </a:lnTo>
+                <a:lnTo>
+                  <a:pt x="12855703" y="5238699"/>
+                </a:lnTo>
+                <a:lnTo>
+                  <a:pt x="0" y="5238699"/>
+                </a:lnTo>
+                <a:lnTo>
+                  <a:pt x="0" y="0"/>
+                </a:lnTo>
+                <a:close/>
+              </a:path>
+            </a:pathLst>
+          </a:custGeom>
+          <a:blipFill>
+            <a:blip r:embed="rId4"/>
+            <a:stretch>
+              <a:fillRect l="0" t="0" r="0" b="0"/>
+            </a:stretch>
+          </a:blipFill>
+        </p:spPr>
+      </p:sp>
+      <p:sp>
+        <p:nvSpPr>
+          <p:cNvPr name="Freeform 6" id="6"/>
+          <p:cNvSpPr/>
+          <p:nvPr/>
+        </p:nvSpPr>
+        <p:spPr>
+          <a:xfrm flipH="false" flipV="false" rot="0">
+            <a:off x="2932165" y="8947515"/>
+            <a:ext cx="12855703" cy="353532"/>
+          </a:xfrm>
+          <a:custGeom>
+            <a:avLst/>
+            <a:gdLst/>
+            <a:ahLst/>
+            <a:cxnLst/>
+            <a:rect r="r" b="b" t="t" l="l"/>
+            <a:pathLst>
+              <a:path h="353532" w="12855703">
+                <a:moveTo>
+                  <a:pt x="0" y="0"/>
+                </a:moveTo>
+                <a:lnTo>
+                  <a:pt x="12855703" y="0"/>
+                </a:lnTo>
+                <a:lnTo>
+                  <a:pt x="12855703" y="353532"/>
+                </a:lnTo>
+                <a:lnTo>
+                  <a:pt x="0" y="353532"/>
+                </a:lnTo>
+                <a:lnTo>
+                  <a:pt x="0" y="0"/>
+                </a:lnTo>
+                <a:close/>
+              </a:path>
+            </a:pathLst>
+          </a:custGeom>
+          <a:blipFill>
+            <a:blip r:embed="rId5"/>
+            <a:stretch>
+              <a:fillRect l="0" t="0" r="0" b="0"/>
+            </a:stretch>
+          </a:blipFill>
+        </p:spPr>
+      </p:sp>
+      <p:sp>
+        <p:nvSpPr>
+          <p:cNvPr name="TextBox 7" id="7"/>
+          <p:cNvSpPr txBox="true"/>
+          <p:nvPr/>
+        </p:nvSpPr>
+        <p:spPr>
+          <a:xfrm rot="0">
+            <a:off x="2789295" y="528002"/>
+            <a:ext cx="7064586" cy="896620"/>
+          </a:xfrm>
+          <a:prstGeom prst="rect">
+            <a:avLst/>
+          </a:prstGeom>
+        </p:spPr>
+        <p:txBody>
+          <a:bodyPr anchor="t" rtlCol="false" tIns="0" lIns="0" bIns="0" rIns="0">
+            <a:spAutoFit/>
+          </a:bodyPr>
+          <a:lstStyle/>
+          <a:p>
+            <a:pPr algn="ctr">
+              <a:lnSpc>
+                <a:spcPts val="7279"/>
+              </a:lnSpc>
+            </a:pPr>
+            <a:r>
+              <a:rPr lang="en-US" sz="5199">
+                <a:solidFill>
+                  <a:srgbClr val="000000"/>
+                </a:solidFill>
+                <a:latin typeface="Bree Serif"/>
+                <a:ea typeface="Bree Serif"/>
+                <a:cs typeface="Bree Serif"/>
+                <a:sym typeface="Bree Serif"/>
+              </a:rPr>
+              <a:t>Tabelas - Venda</a:t>
+            </a:r>
+          </a:p>
+        </p:txBody>
+      </p:sp>
+    </p:spTree>
+  </p:cSld>
+  <p:clrMapOvr>
+    <a:masterClrMapping/>
+  </p:clrMapOvr>
+</p:sld>
+</file>
+
 <file path=ppt/slides/slide2.xml><?xml version="1.0" encoding="utf-8"?>
 <p:sld xmlns:p="http://schemas.openxmlformats.org/presentationml/2006/main" xmlns:a="http://schemas.openxmlformats.org/drawingml/2006/main" xmlns:r="http://schemas.openxmlformats.org/officeDocument/2006/relationships">
   <p:cSld>
@@ -3931,14 +4973,60 @@
       </p:sp>
       <p:sp>
         <p:nvSpPr>
-          <p:cNvPr name="TextBox 4" id="4"/>
+          <p:cNvPr name="Freeform 4" id="4"/>
+          <p:cNvSpPr/>
+          <p:nvPr/>
+        </p:nvSpPr>
+        <p:spPr>
+          <a:xfrm flipH="false" flipV="false" rot="0">
+            <a:off x="2968362" y="2162816"/>
+            <a:ext cx="12351276" cy="7719547"/>
+          </a:xfrm>
+          <a:custGeom>
+            <a:avLst/>
+            <a:gdLst/>
+            <a:ahLst/>
+            <a:cxnLst/>
+            <a:rect r="r" b="b" t="t" l="l"/>
+            <a:pathLst>
+              <a:path h="7719547" w="12351276">
+                <a:moveTo>
+                  <a:pt x="0" y="0"/>
+                </a:moveTo>
+                <a:lnTo>
+                  <a:pt x="12351276" y="0"/>
+                </a:lnTo>
+                <a:lnTo>
+                  <a:pt x="12351276" y="7719547"/>
+                </a:lnTo>
+                <a:lnTo>
+                  <a:pt x="0" y="7719547"/>
+                </a:lnTo>
+                <a:lnTo>
+                  <a:pt x="0" y="0"/>
+                </a:lnTo>
+                <a:close/>
+              </a:path>
+            </a:pathLst>
+          </a:custGeom>
+          <a:blipFill>
+            <a:blip r:embed="rId4"/>
+            <a:stretch>
+              <a:fillRect l="0" t="0" r="0" b="0"/>
+            </a:stretch>
+          </a:blipFill>
+        </p:spPr>
+      </p:sp>
+      <p:sp>
+        <p:nvSpPr>
+          <p:cNvPr name="TextBox 5" id="5"/>
           <p:cNvSpPr txBox="true"/>
           <p:nvPr/>
         </p:nvSpPr>
         <p:spPr>
           <a:xfrm rot="0">
             <a:off x="2789295" y="528002"/>
-            <a:ext cx="4084872" cy="896620"/>
+            <a:ext cx="7750394" cy="896620"/>
           </a:xfrm>
           <a:prstGeom prst="rect">
             <a:avLst/>
@@ -3965,7 +5053,1463 @@
                 <a:cs typeface="Bree Serif"/>
                 <a:sym typeface="Bree Serif"/>
               </a:rPr>
-              <a:t>Objetivo</a:t>
+              <a:t>Modelo Relacional</a:t>
+            </a:r>
+          </a:p>
+        </p:txBody>
+      </p:sp>
+    </p:spTree>
+  </p:cSld>
+  <p:clrMapOvr>
+    <a:masterClrMapping/>
+  </p:clrMapOvr>
+</p:sld>
+</file>
+
+<file path=ppt/slides/slide4.xml><?xml version="1.0" encoding="utf-8"?>
+<p:sld xmlns:p="http://schemas.openxmlformats.org/presentationml/2006/main" xmlns:a="http://schemas.openxmlformats.org/drawingml/2006/main" xmlns:r="http://schemas.openxmlformats.org/officeDocument/2006/relationships">
+  <p:cSld>
+    <p:bg>
+      <p:bgPr>
+        <a:solidFill>
+          <a:srgbClr val="569076"/>
+        </a:solidFill>
+      </p:bgPr>
+    </p:bg>
+    <p:spTree>
+      <p:nvGrpSpPr>
+        <p:cNvPr id="1" name=""/>
+        <p:cNvGrpSpPr/>
+        <p:nvPr/>
+      </p:nvGrpSpPr>
+      <p:grpSpPr>
+        <a:xfrm>
+          <a:off x="0" y="0"/>
+          <a:ext cx="0" cy="0"/>
+          <a:chOff x="0" y="0"/>
+          <a:chExt cx="0" cy="0"/>
+        </a:xfrm>
+      </p:grpSpPr>
+      <p:sp>
+        <p:nvSpPr>
+          <p:cNvPr name="AutoShape 2" id="2"/>
+          <p:cNvSpPr/>
+          <p:nvPr/>
+        </p:nvSpPr>
+        <p:spPr>
+          <a:xfrm>
+            <a:off x="1028700" y="1969856"/>
+            <a:ext cx="16230600" cy="0"/>
+          </a:xfrm>
+          <a:prstGeom prst="line">
+            <a:avLst/>
+          </a:prstGeom>
+          <a:ln cap="flat" w="9525">
+            <a:solidFill>
+              <a:srgbClr val="000000"/>
+            </a:solidFill>
+            <a:prstDash val="solid"/>
+            <a:headEnd type="none" len="sm" w="sm"/>
+            <a:tailEnd type="none" len="sm" w="sm"/>
+          </a:ln>
+        </p:spPr>
+      </p:sp>
+      <p:sp>
+        <p:nvSpPr>
+          <p:cNvPr name="Freeform 3" id="3"/>
+          <p:cNvSpPr/>
+          <p:nvPr/>
+        </p:nvSpPr>
+        <p:spPr>
+          <a:xfrm flipH="false" flipV="false" rot="0">
+            <a:off x="1938926" y="315454"/>
+            <a:ext cx="1700737" cy="1426493"/>
+          </a:xfrm>
+          <a:custGeom>
+            <a:avLst/>
+            <a:gdLst/>
+            <a:ahLst/>
+            <a:cxnLst/>
+            <a:rect r="r" b="b" t="t" l="l"/>
+            <a:pathLst>
+              <a:path h="1426493" w="1700737">
+                <a:moveTo>
+                  <a:pt x="0" y="0"/>
+                </a:moveTo>
+                <a:lnTo>
+                  <a:pt x="1700737" y="0"/>
+                </a:lnTo>
+                <a:lnTo>
+                  <a:pt x="1700737" y="1426492"/>
+                </a:lnTo>
+                <a:lnTo>
+                  <a:pt x="0" y="1426492"/>
+                </a:lnTo>
+                <a:lnTo>
+                  <a:pt x="0" y="0"/>
+                </a:lnTo>
+                <a:close/>
+              </a:path>
+            </a:pathLst>
+          </a:custGeom>
+          <a:blipFill>
+            <a:blip r:embed="rId2"/>
+            <a:stretch>
+              <a:fillRect l="0" t="0" r="0" b="0"/>
+            </a:stretch>
+          </a:blipFill>
+        </p:spPr>
+      </p:sp>
+      <p:sp>
+        <p:nvSpPr>
+          <p:cNvPr name="Freeform 4" id="4"/>
+          <p:cNvSpPr/>
+          <p:nvPr/>
+        </p:nvSpPr>
+        <p:spPr>
+          <a:xfrm flipH="false" flipV="false" rot="0">
+            <a:off x="2932165" y="3720781"/>
+            <a:ext cx="12855703" cy="5335117"/>
+          </a:xfrm>
+          <a:custGeom>
+            <a:avLst/>
+            <a:gdLst/>
+            <a:ahLst/>
+            <a:cxnLst/>
+            <a:rect r="r" b="b" t="t" l="l"/>
+            <a:pathLst>
+              <a:path h="5335117" w="12855703">
+                <a:moveTo>
+                  <a:pt x="0" y="0"/>
+                </a:moveTo>
+                <a:lnTo>
+                  <a:pt x="12855703" y="0"/>
+                </a:lnTo>
+                <a:lnTo>
+                  <a:pt x="12855703" y="5335117"/>
+                </a:lnTo>
+                <a:lnTo>
+                  <a:pt x="0" y="5335117"/>
+                </a:lnTo>
+                <a:lnTo>
+                  <a:pt x="0" y="0"/>
+                </a:lnTo>
+                <a:close/>
+              </a:path>
+            </a:pathLst>
+          </a:custGeom>
+          <a:blipFill>
+            <a:blip r:embed="rId3"/>
+            <a:stretch>
+              <a:fillRect l="0" t="0" r="0" b="0"/>
+            </a:stretch>
+          </a:blipFill>
+        </p:spPr>
+      </p:sp>
+      <p:sp>
+        <p:nvSpPr>
+          <p:cNvPr name="Freeform 5" id="5"/>
+          <p:cNvSpPr/>
+          <p:nvPr/>
+        </p:nvSpPr>
+        <p:spPr>
+          <a:xfrm flipH="false" flipV="false" rot="0">
+            <a:off x="2932165" y="2515559"/>
+            <a:ext cx="12855703" cy="1205222"/>
+          </a:xfrm>
+          <a:custGeom>
+            <a:avLst/>
+            <a:gdLst/>
+            <a:ahLst/>
+            <a:cxnLst/>
+            <a:rect r="r" b="b" t="t" l="l"/>
+            <a:pathLst>
+              <a:path h="1205222" w="12855703">
+                <a:moveTo>
+                  <a:pt x="0" y="0"/>
+                </a:moveTo>
+                <a:lnTo>
+                  <a:pt x="12855703" y="0"/>
+                </a:lnTo>
+                <a:lnTo>
+                  <a:pt x="12855703" y="1205222"/>
+                </a:lnTo>
+                <a:lnTo>
+                  <a:pt x="0" y="1205222"/>
+                </a:lnTo>
+                <a:lnTo>
+                  <a:pt x="0" y="0"/>
+                </a:lnTo>
+                <a:close/>
+              </a:path>
+            </a:pathLst>
+          </a:custGeom>
+          <a:blipFill>
+            <a:blip r:embed="rId4"/>
+            <a:stretch>
+              <a:fillRect l="0" t="0" r="0" b="0"/>
+            </a:stretch>
+          </a:blipFill>
+        </p:spPr>
+      </p:sp>
+      <p:sp>
+        <p:nvSpPr>
+          <p:cNvPr name="TextBox 6" id="6"/>
+          <p:cNvSpPr txBox="true"/>
+          <p:nvPr/>
+        </p:nvSpPr>
+        <p:spPr>
+          <a:xfrm rot="0">
+            <a:off x="2789295" y="528002"/>
+            <a:ext cx="7064586" cy="896620"/>
+          </a:xfrm>
+          <a:prstGeom prst="rect">
+            <a:avLst/>
+          </a:prstGeom>
+        </p:spPr>
+        <p:txBody>
+          <a:bodyPr anchor="t" rtlCol="false" tIns="0" lIns="0" bIns="0" rIns="0">
+            <a:spAutoFit/>
+          </a:bodyPr>
+          <a:lstStyle/>
+          <a:p>
+            <a:pPr algn="ctr">
+              <a:lnSpc>
+                <a:spcPts val="7279"/>
+              </a:lnSpc>
+            </a:pPr>
+            <a:r>
+              <a:rPr lang="en-US" sz="5199">
+                <a:solidFill>
+                  <a:srgbClr val="000000"/>
+                </a:solidFill>
+                <a:latin typeface="Bree Serif"/>
+                <a:ea typeface="Bree Serif"/>
+                <a:cs typeface="Bree Serif"/>
+                <a:sym typeface="Bree Serif"/>
+              </a:rPr>
+              <a:t>Tabelas - Cliente</a:t>
+            </a:r>
+          </a:p>
+        </p:txBody>
+      </p:sp>
+    </p:spTree>
+  </p:cSld>
+  <p:clrMapOvr>
+    <a:masterClrMapping/>
+  </p:clrMapOvr>
+</p:sld>
+</file>
+
+<file path=ppt/slides/slide5.xml><?xml version="1.0" encoding="utf-8"?>
+<p:sld xmlns:p="http://schemas.openxmlformats.org/presentationml/2006/main" xmlns:a="http://schemas.openxmlformats.org/drawingml/2006/main" xmlns:r="http://schemas.openxmlformats.org/officeDocument/2006/relationships">
+  <p:cSld>
+    <p:bg>
+      <p:bgPr>
+        <a:solidFill>
+          <a:srgbClr val="569076"/>
+        </a:solidFill>
+      </p:bgPr>
+    </p:bg>
+    <p:spTree>
+      <p:nvGrpSpPr>
+        <p:cNvPr id="1" name=""/>
+        <p:cNvGrpSpPr/>
+        <p:nvPr/>
+      </p:nvGrpSpPr>
+      <p:grpSpPr>
+        <a:xfrm>
+          <a:off x="0" y="0"/>
+          <a:ext cx="0" cy="0"/>
+          <a:chOff x="0" y="0"/>
+          <a:chExt cx="0" cy="0"/>
+        </a:xfrm>
+      </p:grpSpPr>
+      <p:sp>
+        <p:nvSpPr>
+          <p:cNvPr name="AutoShape 2" id="2"/>
+          <p:cNvSpPr/>
+          <p:nvPr/>
+        </p:nvSpPr>
+        <p:spPr>
+          <a:xfrm>
+            <a:off x="1028700" y="1969856"/>
+            <a:ext cx="16230600" cy="0"/>
+          </a:xfrm>
+          <a:prstGeom prst="line">
+            <a:avLst/>
+          </a:prstGeom>
+          <a:ln cap="flat" w="9525">
+            <a:solidFill>
+              <a:srgbClr val="000000"/>
+            </a:solidFill>
+            <a:prstDash val="solid"/>
+            <a:headEnd type="none" len="sm" w="sm"/>
+            <a:tailEnd type="none" len="sm" w="sm"/>
+          </a:ln>
+        </p:spPr>
+      </p:sp>
+      <p:sp>
+        <p:nvSpPr>
+          <p:cNvPr name="Freeform 3" id="3"/>
+          <p:cNvSpPr/>
+          <p:nvPr/>
+        </p:nvSpPr>
+        <p:spPr>
+          <a:xfrm flipH="false" flipV="false" rot="0">
+            <a:off x="1938926" y="315454"/>
+            <a:ext cx="1700737" cy="1426493"/>
+          </a:xfrm>
+          <a:custGeom>
+            <a:avLst/>
+            <a:gdLst/>
+            <a:ahLst/>
+            <a:cxnLst/>
+            <a:rect r="r" b="b" t="t" l="l"/>
+            <a:pathLst>
+              <a:path h="1426493" w="1700737">
+                <a:moveTo>
+                  <a:pt x="0" y="0"/>
+                </a:moveTo>
+                <a:lnTo>
+                  <a:pt x="1700737" y="0"/>
+                </a:lnTo>
+                <a:lnTo>
+                  <a:pt x="1700737" y="1426492"/>
+                </a:lnTo>
+                <a:lnTo>
+                  <a:pt x="0" y="1426492"/>
+                </a:lnTo>
+                <a:lnTo>
+                  <a:pt x="0" y="0"/>
+                </a:lnTo>
+                <a:close/>
+              </a:path>
+            </a:pathLst>
+          </a:custGeom>
+          <a:blipFill>
+            <a:blip r:embed="rId2"/>
+            <a:stretch>
+              <a:fillRect l="0" t="0" r="0" b="0"/>
+            </a:stretch>
+          </a:blipFill>
+        </p:spPr>
+      </p:sp>
+      <p:sp>
+        <p:nvSpPr>
+          <p:cNvPr name="Freeform 4" id="4"/>
+          <p:cNvSpPr/>
+          <p:nvPr/>
+        </p:nvSpPr>
+        <p:spPr>
+          <a:xfrm flipH="false" flipV="false" rot="0">
+            <a:off x="2932165" y="3720781"/>
+            <a:ext cx="12855703" cy="4788749"/>
+          </a:xfrm>
+          <a:custGeom>
+            <a:avLst/>
+            <a:gdLst/>
+            <a:ahLst/>
+            <a:cxnLst/>
+            <a:rect r="r" b="b" t="t" l="l"/>
+            <a:pathLst>
+              <a:path h="4788749" w="12855703">
+                <a:moveTo>
+                  <a:pt x="0" y="0"/>
+                </a:moveTo>
+                <a:lnTo>
+                  <a:pt x="12855703" y="0"/>
+                </a:lnTo>
+                <a:lnTo>
+                  <a:pt x="12855703" y="4788750"/>
+                </a:lnTo>
+                <a:lnTo>
+                  <a:pt x="0" y="4788750"/>
+                </a:lnTo>
+                <a:lnTo>
+                  <a:pt x="0" y="0"/>
+                </a:lnTo>
+                <a:close/>
+              </a:path>
+            </a:pathLst>
+          </a:custGeom>
+          <a:blipFill>
+            <a:blip r:embed="rId3"/>
+            <a:stretch>
+              <a:fillRect l="0" t="0" r="0" b="0"/>
+            </a:stretch>
+          </a:blipFill>
+        </p:spPr>
+      </p:sp>
+      <p:sp>
+        <p:nvSpPr>
+          <p:cNvPr name="TextBox 5" id="5"/>
+          <p:cNvSpPr txBox="true"/>
+          <p:nvPr/>
+        </p:nvSpPr>
+        <p:spPr>
+          <a:xfrm rot="0">
+            <a:off x="2789295" y="528002"/>
+            <a:ext cx="8932820" cy="896620"/>
+          </a:xfrm>
+          <a:prstGeom prst="rect">
+            <a:avLst/>
+          </a:prstGeom>
+        </p:spPr>
+        <p:txBody>
+          <a:bodyPr anchor="t" rtlCol="false" tIns="0" lIns="0" bIns="0" rIns="0">
+            <a:spAutoFit/>
+          </a:bodyPr>
+          <a:lstStyle/>
+          <a:p>
+            <a:pPr algn="ctr">
+              <a:lnSpc>
+                <a:spcPts val="7279"/>
+              </a:lnSpc>
+            </a:pPr>
+            <a:r>
+              <a:rPr lang="en-US" sz="5199">
+                <a:solidFill>
+                  <a:srgbClr val="000000"/>
+                </a:solidFill>
+                <a:latin typeface="Bree Serif"/>
+                <a:ea typeface="Bree Serif"/>
+                <a:cs typeface="Bree Serif"/>
+                <a:sym typeface="Bree Serif"/>
+              </a:rPr>
+              <a:t>Tabelas - Condicional</a:t>
+            </a:r>
+          </a:p>
+        </p:txBody>
+      </p:sp>
+      <p:sp>
+        <p:nvSpPr>
+          <p:cNvPr name="Freeform 6" id="6"/>
+          <p:cNvSpPr/>
+          <p:nvPr/>
+        </p:nvSpPr>
+        <p:spPr>
+          <a:xfrm flipH="false" flipV="false" rot="0">
+            <a:off x="2932165" y="2515559"/>
+            <a:ext cx="12855703" cy="1205222"/>
+          </a:xfrm>
+          <a:custGeom>
+            <a:avLst/>
+            <a:gdLst/>
+            <a:ahLst/>
+            <a:cxnLst/>
+            <a:rect r="r" b="b" t="t" l="l"/>
+            <a:pathLst>
+              <a:path h="1205222" w="12855703">
+                <a:moveTo>
+                  <a:pt x="0" y="0"/>
+                </a:moveTo>
+                <a:lnTo>
+                  <a:pt x="12855703" y="0"/>
+                </a:lnTo>
+                <a:lnTo>
+                  <a:pt x="12855703" y="1205222"/>
+                </a:lnTo>
+                <a:lnTo>
+                  <a:pt x="0" y="1205222"/>
+                </a:lnTo>
+                <a:lnTo>
+                  <a:pt x="0" y="0"/>
+                </a:lnTo>
+                <a:close/>
+              </a:path>
+            </a:pathLst>
+          </a:custGeom>
+          <a:blipFill>
+            <a:blip r:embed="rId4"/>
+            <a:stretch>
+              <a:fillRect l="0" t="0" r="0" b="0"/>
+            </a:stretch>
+          </a:blipFill>
+        </p:spPr>
+      </p:sp>
+    </p:spTree>
+  </p:cSld>
+  <p:clrMapOvr>
+    <a:masterClrMapping/>
+  </p:clrMapOvr>
+</p:sld>
+</file>
+
+<file path=ppt/slides/slide6.xml><?xml version="1.0" encoding="utf-8"?>
+<p:sld xmlns:p="http://schemas.openxmlformats.org/presentationml/2006/main" xmlns:a="http://schemas.openxmlformats.org/drawingml/2006/main" xmlns:r="http://schemas.openxmlformats.org/officeDocument/2006/relationships">
+  <p:cSld>
+    <p:bg>
+      <p:bgPr>
+        <a:solidFill>
+          <a:srgbClr val="569076"/>
+        </a:solidFill>
+      </p:bgPr>
+    </p:bg>
+    <p:spTree>
+      <p:nvGrpSpPr>
+        <p:cNvPr id="1" name=""/>
+        <p:cNvGrpSpPr/>
+        <p:nvPr/>
+      </p:nvGrpSpPr>
+      <p:grpSpPr>
+        <a:xfrm>
+          <a:off x="0" y="0"/>
+          <a:ext cx="0" cy="0"/>
+          <a:chOff x="0" y="0"/>
+          <a:chExt cx="0" cy="0"/>
+        </a:xfrm>
+      </p:grpSpPr>
+      <p:sp>
+        <p:nvSpPr>
+          <p:cNvPr name="AutoShape 2" id="2"/>
+          <p:cNvSpPr/>
+          <p:nvPr/>
+        </p:nvSpPr>
+        <p:spPr>
+          <a:xfrm>
+            <a:off x="1028700" y="1969856"/>
+            <a:ext cx="16230600" cy="0"/>
+          </a:xfrm>
+          <a:prstGeom prst="line">
+            <a:avLst/>
+          </a:prstGeom>
+          <a:ln cap="flat" w="9525">
+            <a:solidFill>
+              <a:srgbClr val="000000"/>
+            </a:solidFill>
+            <a:prstDash val="solid"/>
+            <a:headEnd type="none" len="sm" w="sm"/>
+            <a:tailEnd type="none" len="sm" w="sm"/>
+          </a:ln>
+        </p:spPr>
+      </p:sp>
+      <p:sp>
+        <p:nvSpPr>
+          <p:cNvPr name="Freeform 3" id="3"/>
+          <p:cNvSpPr/>
+          <p:nvPr/>
+        </p:nvSpPr>
+        <p:spPr>
+          <a:xfrm flipH="false" flipV="false" rot="0">
+            <a:off x="1938926" y="315454"/>
+            <a:ext cx="1700737" cy="1426493"/>
+          </a:xfrm>
+          <a:custGeom>
+            <a:avLst/>
+            <a:gdLst/>
+            <a:ahLst/>
+            <a:cxnLst/>
+            <a:rect r="r" b="b" t="t" l="l"/>
+            <a:pathLst>
+              <a:path h="1426493" w="1700737">
+                <a:moveTo>
+                  <a:pt x="0" y="0"/>
+                </a:moveTo>
+                <a:lnTo>
+                  <a:pt x="1700737" y="0"/>
+                </a:lnTo>
+                <a:lnTo>
+                  <a:pt x="1700737" y="1426492"/>
+                </a:lnTo>
+                <a:lnTo>
+                  <a:pt x="0" y="1426492"/>
+                </a:lnTo>
+                <a:lnTo>
+                  <a:pt x="0" y="0"/>
+                </a:lnTo>
+                <a:close/>
+              </a:path>
+            </a:pathLst>
+          </a:custGeom>
+          <a:blipFill>
+            <a:blip r:embed="rId2"/>
+            <a:stretch>
+              <a:fillRect l="0" t="0" r="0" b="0"/>
+            </a:stretch>
+          </a:blipFill>
+        </p:spPr>
+      </p:sp>
+      <p:sp>
+        <p:nvSpPr>
+          <p:cNvPr name="Freeform 4" id="4"/>
+          <p:cNvSpPr/>
+          <p:nvPr/>
+        </p:nvSpPr>
+        <p:spPr>
+          <a:xfrm flipH="false" flipV="false" rot="0">
+            <a:off x="2932165" y="2515559"/>
+            <a:ext cx="12855703" cy="1205222"/>
+          </a:xfrm>
+          <a:custGeom>
+            <a:avLst/>
+            <a:gdLst/>
+            <a:ahLst/>
+            <a:cxnLst/>
+            <a:rect r="r" b="b" t="t" l="l"/>
+            <a:pathLst>
+              <a:path h="1205222" w="12855703">
+                <a:moveTo>
+                  <a:pt x="0" y="0"/>
+                </a:moveTo>
+                <a:lnTo>
+                  <a:pt x="12855703" y="0"/>
+                </a:lnTo>
+                <a:lnTo>
+                  <a:pt x="12855703" y="1205222"/>
+                </a:lnTo>
+                <a:lnTo>
+                  <a:pt x="0" y="1205222"/>
+                </a:lnTo>
+                <a:lnTo>
+                  <a:pt x="0" y="0"/>
+                </a:lnTo>
+                <a:close/>
+              </a:path>
+            </a:pathLst>
+          </a:custGeom>
+          <a:blipFill>
+            <a:blip r:embed="rId3"/>
+            <a:stretch>
+              <a:fillRect l="0" t="0" r="0" b="0"/>
+            </a:stretch>
+          </a:blipFill>
+        </p:spPr>
+      </p:sp>
+      <p:sp>
+        <p:nvSpPr>
+          <p:cNvPr name="Freeform 5" id="5"/>
+          <p:cNvSpPr/>
+          <p:nvPr/>
+        </p:nvSpPr>
+        <p:spPr>
+          <a:xfrm flipH="false" flipV="false" rot="0">
+            <a:off x="2932165" y="3720781"/>
+            <a:ext cx="12855703" cy="4547705"/>
+          </a:xfrm>
+          <a:custGeom>
+            <a:avLst/>
+            <a:gdLst/>
+            <a:ahLst/>
+            <a:cxnLst/>
+            <a:rect r="r" b="b" t="t" l="l"/>
+            <a:pathLst>
+              <a:path h="4547705" w="12855703">
+                <a:moveTo>
+                  <a:pt x="0" y="0"/>
+                </a:moveTo>
+                <a:lnTo>
+                  <a:pt x="12855703" y="0"/>
+                </a:lnTo>
+                <a:lnTo>
+                  <a:pt x="12855703" y="4547705"/>
+                </a:lnTo>
+                <a:lnTo>
+                  <a:pt x="0" y="4547705"/>
+                </a:lnTo>
+                <a:lnTo>
+                  <a:pt x="0" y="0"/>
+                </a:lnTo>
+                <a:close/>
+              </a:path>
+            </a:pathLst>
+          </a:custGeom>
+          <a:blipFill>
+            <a:blip r:embed="rId4"/>
+            <a:stretch>
+              <a:fillRect l="0" t="0" r="0" b="0"/>
+            </a:stretch>
+          </a:blipFill>
+        </p:spPr>
+      </p:sp>
+      <p:sp>
+        <p:nvSpPr>
+          <p:cNvPr name="TextBox 6" id="6"/>
+          <p:cNvSpPr txBox="true"/>
+          <p:nvPr/>
+        </p:nvSpPr>
+        <p:spPr>
+          <a:xfrm rot="0">
+            <a:off x="2789295" y="528002"/>
+            <a:ext cx="8932820" cy="896620"/>
+          </a:xfrm>
+          <a:prstGeom prst="rect">
+            <a:avLst/>
+          </a:prstGeom>
+        </p:spPr>
+        <p:txBody>
+          <a:bodyPr anchor="t" rtlCol="false" tIns="0" lIns="0" bIns="0" rIns="0">
+            <a:spAutoFit/>
+          </a:bodyPr>
+          <a:lstStyle/>
+          <a:p>
+            <a:pPr algn="ctr">
+              <a:lnSpc>
+                <a:spcPts val="7279"/>
+              </a:lnSpc>
+            </a:pPr>
+            <a:r>
+              <a:rPr lang="en-US" sz="5199">
+                <a:solidFill>
+                  <a:srgbClr val="000000"/>
+                </a:solidFill>
+                <a:latin typeface="Bree Serif"/>
+                <a:ea typeface="Bree Serif"/>
+                <a:cs typeface="Bree Serif"/>
+                <a:sym typeface="Bree Serif"/>
+              </a:rPr>
+              <a:t>Tabelas - Desconto</a:t>
+            </a:r>
+          </a:p>
+        </p:txBody>
+      </p:sp>
+    </p:spTree>
+  </p:cSld>
+  <p:clrMapOvr>
+    <a:masterClrMapping/>
+  </p:clrMapOvr>
+</p:sld>
+</file>
+
+<file path=ppt/slides/slide7.xml><?xml version="1.0" encoding="utf-8"?>
+<p:sld xmlns:p="http://schemas.openxmlformats.org/presentationml/2006/main" xmlns:a="http://schemas.openxmlformats.org/drawingml/2006/main" xmlns:r="http://schemas.openxmlformats.org/officeDocument/2006/relationships">
+  <p:cSld>
+    <p:bg>
+      <p:bgPr>
+        <a:solidFill>
+          <a:srgbClr val="569076"/>
+        </a:solidFill>
+      </p:bgPr>
+    </p:bg>
+    <p:spTree>
+      <p:nvGrpSpPr>
+        <p:cNvPr id="1" name=""/>
+        <p:cNvGrpSpPr/>
+        <p:nvPr/>
+      </p:nvGrpSpPr>
+      <p:grpSpPr>
+        <a:xfrm>
+          <a:off x="0" y="0"/>
+          <a:ext cx="0" cy="0"/>
+          <a:chOff x="0" y="0"/>
+          <a:chExt cx="0" cy="0"/>
+        </a:xfrm>
+      </p:grpSpPr>
+      <p:sp>
+        <p:nvSpPr>
+          <p:cNvPr name="AutoShape 2" id="2"/>
+          <p:cNvSpPr/>
+          <p:nvPr/>
+        </p:nvSpPr>
+        <p:spPr>
+          <a:xfrm>
+            <a:off x="1028700" y="1969856"/>
+            <a:ext cx="16230600" cy="0"/>
+          </a:xfrm>
+          <a:prstGeom prst="line">
+            <a:avLst/>
+          </a:prstGeom>
+          <a:ln cap="flat" w="9525">
+            <a:solidFill>
+              <a:srgbClr val="000000"/>
+            </a:solidFill>
+            <a:prstDash val="solid"/>
+            <a:headEnd type="none" len="sm" w="sm"/>
+            <a:tailEnd type="none" len="sm" w="sm"/>
+          </a:ln>
+        </p:spPr>
+      </p:sp>
+      <p:sp>
+        <p:nvSpPr>
+          <p:cNvPr name="Freeform 3" id="3"/>
+          <p:cNvSpPr/>
+          <p:nvPr/>
+        </p:nvSpPr>
+        <p:spPr>
+          <a:xfrm flipH="false" flipV="false" rot="0">
+            <a:off x="1938926" y="315454"/>
+            <a:ext cx="1700737" cy="1426493"/>
+          </a:xfrm>
+          <a:custGeom>
+            <a:avLst/>
+            <a:gdLst/>
+            <a:ahLst/>
+            <a:cxnLst/>
+            <a:rect r="r" b="b" t="t" l="l"/>
+            <a:pathLst>
+              <a:path h="1426493" w="1700737">
+                <a:moveTo>
+                  <a:pt x="0" y="0"/>
+                </a:moveTo>
+                <a:lnTo>
+                  <a:pt x="1700737" y="0"/>
+                </a:lnTo>
+                <a:lnTo>
+                  <a:pt x="1700737" y="1426492"/>
+                </a:lnTo>
+                <a:lnTo>
+                  <a:pt x="0" y="1426492"/>
+                </a:lnTo>
+                <a:lnTo>
+                  <a:pt x="0" y="0"/>
+                </a:lnTo>
+                <a:close/>
+              </a:path>
+            </a:pathLst>
+          </a:custGeom>
+          <a:blipFill>
+            <a:blip r:embed="rId2"/>
+            <a:stretch>
+              <a:fillRect l="0" t="0" r="0" b="0"/>
+            </a:stretch>
+          </a:blipFill>
+        </p:spPr>
+      </p:sp>
+      <p:sp>
+        <p:nvSpPr>
+          <p:cNvPr name="Freeform 4" id="4"/>
+          <p:cNvSpPr/>
+          <p:nvPr/>
+        </p:nvSpPr>
+        <p:spPr>
+          <a:xfrm flipH="false" flipV="false" rot="0">
+            <a:off x="2932165" y="2515559"/>
+            <a:ext cx="12855703" cy="1205222"/>
+          </a:xfrm>
+          <a:custGeom>
+            <a:avLst/>
+            <a:gdLst/>
+            <a:ahLst/>
+            <a:cxnLst/>
+            <a:rect r="r" b="b" t="t" l="l"/>
+            <a:pathLst>
+              <a:path h="1205222" w="12855703">
+                <a:moveTo>
+                  <a:pt x="0" y="0"/>
+                </a:moveTo>
+                <a:lnTo>
+                  <a:pt x="12855703" y="0"/>
+                </a:lnTo>
+                <a:lnTo>
+                  <a:pt x="12855703" y="1205222"/>
+                </a:lnTo>
+                <a:lnTo>
+                  <a:pt x="0" y="1205222"/>
+                </a:lnTo>
+                <a:lnTo>
+                  <a:pt x="0" y="0"/>
+                </a:lnTo>
+                <a:close/>
+              </a:path>
+            </a:pathLst>
+          </a:custGeom>
+          <a:blipFill>
+            <a:blip r:embed="rId3"/>
+            <a:stretch>
+              <a:fillRect l="0" t="0" r="0" b="0"/>
+            </a:stretch>
+          </a:blipFill>
+        </p:spPr>
+      </p:sp>
+      <p:sp>
+        <p:nvSpPr>
+          <p:cNvPr name="Freeform 5" id="5"/>
+          <p:cNvSpPr/>
+          <p:nvPr/>
+        </p:nvSpPr>
+        <p:spPr>
+          <a:xfrm flipH="false" flipV="false" rot="0">
+            <a:off x="2932165" y="3720781"/>
+            <a:ext cx="12855703" cy="2008704"/>
+          </a:xfrm>
+          <a:custGeom>
+            <a:avLst/>
+            <a:gdLst/>
+            <a:ahLst/>
+            <a:cxnLst/>
+            <a:rect r="r" b="b" t="t" l="l"/>
+            <a:pathLst>
+              <a:path h="2008704" w="12855703">
+                <a:moveTo>
+                  <a:pt x="0" y="0"/>
+                </a:moveTo>
+                <a:lnTo>
+                  <a:pt x="12855703" y="0"/>
+                </a:lnTo>
+                <a:lnTo>
+                  <a:pt x="12855703" y="2008704"/>
+                </a:lnTo>
+                <a:lnTo>
+                  <a:pt x="0" y="2008704"/>
+                </a:lnTo>
+                <a:lnTo>
+                  <a:pt x="0" y="0"/>
+                </a:lnTo>
+                <a:close/>
+              </a:path>
+            </a:pathLst>
+          </a:custGeom>
+          <a:blipFill>
+            <a:blip r:embed="rId4"/>
+            <a:stretch>
+              <a:fillRect l="0" t="0" r="0" b="0"/>
+            </a:stretch>
+          </a:blipFill>
+        </p:spPr>
+      </p:sp>
+      <p:sp>
+        <p:nvSpPr>
+          <p:cNvPr name="Freeform 6" id="6"/>
+          <p:cNvSpPr/>
+          <p:nvPr/>
+        </p:nvSpPr>
+        <p:spPr>
+          <a:xfrm flipH="false" flipV="false" rot="0">
+            <a:off x="2932165" y="5583117"/>
+            <a:ext cx="12855703" cy="3519249"/>
+          </a:xfrm>
+          <a:custGeom>
+            <a:avLst/>
+            <a:gdLst/>
+            <a:ahLst/>
+            <a:cxnLst/>
+            <a:rect r="r" b="b" t="t" l="l"/>
+            <a:pathLst>
+              <a:path h="3519249" w="12855703">
+                <a:moveTo>
+                  <a:pt x="0" y="0"/>
+                </a:moveTo>
+                <a:lnTo>
+                  <a:pt x="12855703" y="0"/>
+                </a:lnTo>
+                <a:lnTo>
+                  <a:pt x="12855703" y="3519248"/>
+                </a:lnTo>
+                <a:lnTo>
+                  <a:pt x="0" y="3519248"/>
+                </a:lnTo>
+                <a:lnTo>
+                  <a:pt x="0" y="0"/>
+                </a:lnTo>
+                <a:close/>
+              </a:path>
+            </a:pathLst>
+          </a:custGeom>
+          <a:blipFill>
+            <a:blip r:embed="rId5"/>
+            <a:stretch>
+              <a:fillRect l="0" t="0" r="0" b="0"/>
+            </a:stretch>
+          </a:blipFill>
+        </p:spPr>
+      </p:sp>
+      <p:sp>
+        <p:nvSpPr>
+          <p:cNvPr name="TextBox 7" id="7"/>
+          <p:cNvSpPr txBox="true"/>
+          <p:nvPr/>
+        </p:nvSpPr>
+        <p:spPr>
+          <a:xfrm rot="0">
+            <a:off x="2789295" y="528002"/>
+            <a:ext cx="8932820" cy="896620"/>
+          </a:xfrm>
+          <a:prstGeom prst="rect">
+            <a:avLst/>
+          </a:prstGeom>
+        </p:spPr>
+        <p:txBody>
+          <a:bodyPr anchor="t" rtlCol="false" tIns="0" lIns="0" bIns="0" rIns="0">
+            <a:spAutoFit/>
+          </a:bodyPr>
+          <a:lstStyle/>
+          <a:p>
+            <a:pPr algn="ctr">
+              <a:lnSpc>
+                <a:spcPts val="7279"/>
+              </a:lnSpc>
+            </a:pPr>
+            <a:r>
+              <a:rPr lang="en-US" sz="5199">
+                <a:solidFill>
+                  <a:srgbClr val="000000"/>
+                </a:solidFill>
+                <a:latin typeface="Bree Serif"/>
+                <a:ea typeface="Bree Serif"/>
+                <a:cs typeface="Bree Serif"/>
+                <a:sym typeface="Bree Serif"/>
+              </a:rPr>
+              <a:t>Tabelas - Fornecedor</a:t>
+            </a:r>
+          </a:p>
+        </p:txBody>
+      </p:sp>
+    </p:spTree>
+  </p:cSld>
+  <p:clrMapOvr>
+    <a:masterClrMapping/>
+  </p:clrMapOvr>
+</p:sld>
+</file>
+
+<file path=ppt/slides/slide8.xml><?xml version="1.0" encoding="utf-8"?>
+<p:sld xmlns:p="http://schemas.openxmlformats.org/presentationml/2006/main" xmlns:a="http://schemas.openxmlformats.org/drawingml/2006/main" xmlns:r="http://schemas.openxmlformats.org/officeDocument/2006/relationships">
+  <p:cSld>
+    <p:bg>
+      <p:bgPr>
+        <a:solidFill>
+          <a:srgbClr val="569076"/>
+        </a:solidFill>
+      </p:bgPr>
+    </p:bg>
+    <p:spTree>
+      <p:nvGrpSpPr>
+        <p:cNvPr id="1" name=""/>
+        <p:cNvGrpSpPr/>
+        <p:nvPr/>
+      </p:nvGrpSpPr>
+      <p:grpSpPr>
+        <a:xfrm>
+          <a:off x="0" y="0"/>
+          <a:ext cx="0" cy="0"/>
+          <a:chOff x="0" y="0"/>
+          <a:chExt cx="0" cy="0"/>
+        </a:xfrm>
+      </p:grpSpPr>
+      <p:sp>
+        <p:nvSpPr>
+          <p:cNvPr name="AutoShape 2" id="2"/>
+          <p:cNvSpPr/>
+          <p:nvPr/>
+        </p:nvSpPr>
+        <p:spPr>
+          <a:xfrm>
+            <a:off x="1028700" y="1969856"/>
+            <a:ext cx="16230600" cy="0"/>
+          </a:xfrm>
+          <a:prstGeom prst="line">
+            <a:avLst/>
+          </a:prstGeom>
+          <a:ln cap="flat" w="9525">
+            <a:solidFill>
+              <a:srgbClr val="000000"/>
+            </a:solidFill>
+            <a:prstDash val="solid"/>
+            <a:headEnd type="none" len="sm" w="sm"/>
+            <a:tailEnd type="none" len="sm" w="sm"/>
+          </a:ln>
+        </p:spPr>
+      </p:sp>
+      <p:sp>
+        <p:nvSpPr>
+          <p:cNvPr name="Freeform 3" id="3"/>
+          <p:cNvSpPr/>
+          <p:nvPr/>
+        </p:nvSpPr>
+        <p:spPr>
+          <a:xfrm flipH="false" flipV="false" rot="0">
+            <a:off x="1938926" y="315454"/>
+            <a:ext cx="1700737" cy="1426493"/>
+          </a:xfrm>
+          <a:custGeom>
+            <a:avLst/>
+            <a:gdLst/>
+            <a:ahLst/>
+            <a:cxnLst/>
+            <a:rect r="r" b="b" t="t" l="l"/>
+            <a:pathLst>
+              <a:path h="1426493" w="1700737">
+                <a:moveTo>
+                  <a:pt x="0" y="0"/>
+                </a:moveTo>
+                <a:lnTo>
+                  <a:pt x="1700737" y="0"/>
+                </a:lnTo>
+                <a:lnTo>
+                  <a:pt x="1700737" y="1426492"/>
+                </a:lnTo>
+                <a:lnTo>
+                  <a:pt x="0" y="1426492"/>
+                </a:lnTo>
+                <a:lnTo>
+                  <a:pt x="0" y="0"/>
+                </a:lnTo>
+                <a:close/>
+              </a:path>
+            </a:pathLst>
+          </a:custGeom>
+          <a:blipFill>
+            <a:blip r:embed="rId2"/>
+            <a:stretch>
+              <a:fillRect l="0" t="0" r="0" b="0"/>
+            </a:stretch>
+          </a:blipFill>
+        </p:spPr>
+      </p:sp>
+      <p:sp>
+        <p:nvSpPr>
+          <p:cNvPr name="Freeform 4" id="4"/>
+          <p:cNvSpPr/>
+          <p:nvPr/>
+        </p:nvSpPr>
+        <p:spPr>
+          <a:xfrm flipH="false" flipV="false" rot="0">
+            <a:off x="3980212" y="2327675"/>
+            <a:ext cx="10327577" cy="968210"/>
+          </a:xfrm>
+          <a:custGeom>
+            <a:avLst/>
+            <a:gdLst/>
+            <a:ahLst/>
+            <a:cxnLst/>
+            <a:rect r="r" b="b" t="t" l="l"/>
+            <a:pathLst>
+              <a:path h="968210" w="10327577">
+                <a:moveTo>
+                  <a:pt x="0" y="0"/>
+                </a:moveTo>
+                <a:lnTo>
+                  <a:pt x="10327576" y="0"/>
+                </a:lnTo>
+                <a:lnTo>
+                  <a:pt x="10327576" y="968210"/>
+                </a:lnTo>
+                <a:lnTo>
+                  <a:pt x="0" y="968210"/>
+                </a:lnTo>
+                <a:lnTo>
+                  <a:pt x="0" y="0"/>
+                </a:lnTo>
+                <a:close/>
+              </a:path>
+            </a:pathLst>
+          </a:custGeom>
+          <a:blipFill>
+            <a:blip r:embed="rId3"/>
+            <a:stretch>
+              <a:fillRect l="0" t="0" r="0" b="0"/>
+            </a:stretch>
+          </a:blipFill>
+        </p:spPr>
+      </p:sp>
+      <p:sp>
+        <p:nvSpPr>
+          <p:cNvPr name="Freeform 5" id="5"/>
+          <p:cNvSpPr/>
+          <p:nvPr/>
+        </p:nvSpPr>
+        <p:spPr>
+          <a:xfrm flipH="false" flipV="false" rot="0">
+            <a:off x="3980212" y="3295885"/>
+            <a:ext cx="10327577" cy="6635468"/>
+          </a:xfrm>
+          <a:custGeom>
+            <a:avLst/>
+            <a:gdLst/>
+            <a:ahLst/>
+            <a:cxnLst/>
+            <a:rect r="r" b="b" t="t" l="l"/>
+            <a:pathLst>
+              <a:path h="6635468" w="10327577">
+                <a:moveTo>
+                  <a:pt x="0" y="0"/>
+                </a:moveTo>
+                <a:lnTo>
+                  <a:pt x="10327576" y="0"/>
+                </a:lnTo>
+                <a:lnTo>
+                  <a:pt x="10327576" y="6635468"/>
+                </a:lnTo>
+                <a:lnTo>
+                  <a:pt x="0" y="6635468"/>
+                </a:lnTo>
+                <a:lnTo>
+                  <a:pt x="0" y="0"/>
+                </a:lnTo>
+                <a:close/>
+              </a:path>
+            </a:pathLst>
+          </a:custGeom>
+          <a:blipFill>
+            <a:blip r:embed="rId4"/>
+            <a:stretch>
+              <a:fillRect l="0" t="0" r="0" b="0"/>
+            </a:stretch>
+          </a:blipFill>
+        </p:spPr>
+      </p:sp>
+      <p:sp>
+        <p:nvSpPr>
+          <p:cNvPr name="TextBox 6" id="6"/>
+          <p:cNvSpPr txBox="true"/>
+          <p:nvPr/>
+        </p:nvSpPr>
+        <p:spPr>
+          <a:xfrm rot="0">
+            <a:off x="2789295" y="528002"/>
+            <a:ext cx="8932820" cy="896620"/>
+          </a:xfrm>
+          <a:prstGeom prst="rect">
+            <a:avLst/>
+          </a:prstGeom>
+        </p:spPr>
+        <p:txBody>
+          <a:bodyPr anchor="t" rtlCol="false" tIns="0" lIns="0" bIns="0" rIns="0">
+            <a:spAutoFit/>
+          </a:bodyPr>
+          <a:lstStyle/>
+          <a:p>
+            <a:pPr algn="ctr">
+              <a:lnSpc>
+                <a:spcPts val="7279"/>
+              </a:lnSpc>
+            </a:pPr>
+            <a:r>
+              <a:rPr lang="en-US" sz="5199">
+                <a:solidFill>
+                  <a:srgbClr val="000000"/>
+                </a:solidFill>
+                <a:latin typeface="Bree Serif"/>
+                <a:ea typeface="Bree Serif"/>
+                <a:cs typeface="Bree Serif"/>
+                <a:sym typeface="Bree Serif"/>
+              </a:rPr>
+              <a:t>Tabelas - Funcionario</a:t>
+            </a:r>
+          </a:p>
+        </p:txBody>
+      </p:sp>
+    </p:spTree>
+  </p:cSld>
+  <p:clrMapOvr>
+    <a:masterClrMapping/>
+  </p:clrMapOvr>
+</p:sld>
+</file>
+
+<file path=ppt/slides/slide9.xml><?xml version="1.0" encoding="utf-8"?>
+<p:sld xmlns:p="http://schemas.openxmlformats.org/presentationml/2006/main" xmlns:a="http://schemas.openxmlformats.org/drawingml/2006/main" xmlns:r="http://schemas.openxmlformats.org/officeDocument/2006/relationships">
+  <p:cSld>
+    <p:bg>
+      <p:bgPr>
+        <a:solidFill>
+          <a:srgbClr val="569076"/>
+        </a:solidFill>
+      </p:bgPr>
+    </p:bg>
+    <p:spTree>
+      <p:nvGrpSpPr>
+        <p:cNvPr id="1" name=""/>
+        <p:cNvGrpSpPr/>
+        <p:nvPr/>
+      </p:nvGrpSpPr>
+      <p:grpSpPr>
+        <a:xfrm>
+          <a:off x="0" y="0"/>
+          <a:ext cx="0" cy="0"/>
+          <a:chOff x="0" y="0"/>
+          <a:chExt cx="0" cy="0"/>
+        </a:xfrm>
+      </p:grpSpPr>
+      <p:sp>
+        <p:nvSpPr>
+          <p:cNvPr name="AutoShape 2" id="2"/>
+          <p:cNvSpPr/>
+          <p:nvPr/>
+        </p:nvSpPr>
+        <p:spPr>
+          <a:xfrm>
+            <a:off x="1028700" y="1969856"/>
+            <a:ext cx="16230600" cy="0"/>
+          </a:xfrm>
+          <a:prstGeom prst="line">
+            <a:avLst/>
+          </a:prstGeom>
+          <a:ln cap="flat" w="9525">
+            <a:solidFill>
+              <a:srgbClr val="000000"/>
+            </a:solidFill>
+            <a:prstDash val="solid"/>
+            <a:headEnd type="none" len="sm" w="sm"/>
+            <a:tailEnd type="none" len="sm" w="sm"/>
+          </a:ln>
+        </p:spPr>
+      </p:sp>
+      <p:sp>
+        <p:nvSpPr>
+          <p:cNvPr name="Freeform 3" id="3"/>
+          <p:cNvSpPr/>
+          <p:nvPr/>
+        </p:nvSpPr>
+        <p:spPr>
+          <a:xfrm flipH="false" flipV="false" rot="0">
+            <a:off x="1938926" y="315454"/>
+            <a:ext cx="1700737" cy="1426493"/>
+          </a:xfrm>
+          <a:custGeom>
+            <a:avLst/>
+            <a:gdLst/>
+            <a:ahLst/>
+            <a:cxnLst/>
+            <a:rect r="r" b="b" t="t" l="l"/>
+            <a:pathLst>
+              <a:path h="1426493" w="1700737">
+                <a:moveTo>
+                  <a:pt x="0" y="0"/>
+                </a:moveTo>
+                <a:lnTo>
+                  <a:pt x="1700737" y="0"/>
+                </a:lnTo>
+                <a:lnTo>
+                  <a:pt x="1700737" y="1426492"/>
+                </a:lnTo>
+                <a:lnTo>
+                  <a:pt x="0" y="1426492"/>
+                </a:lnTo>
+                <a:lnTo>
+                  <a:pt x="0" y="0"/>
+                </a:lnTo>
+                <a:close/>
+              </a:path>
+            </a:pathLst>
+          </a:custGeom>
+          <a:blipFill>
+            <a:blip r:embed="rId2"/>
+            <a:stretch>
+              <a:fillRect l="0" t="0" r="0" b="0"/>
+            </a:stretch>
+          </a:blipFill>
+        </p:spPr>
+      </p:sp>
+      <p:sp>
+        <p:nvSpPr>
+          <p:cNvPr name="Freeform 4" id="4"/>
+          <p:cNvSpPr/>
+          <p:nvPr/>
+        </p:nvSpPr>
+        <p:spPr>
+          <a:xfrm flipH="false" flipV="false" rot="0">
+            <a:off x="2932165" y="3437852"/>
+            <a:ext cx="12855703" cy="1205222"/>
+          </a:xfrm>
+          <a:custGeom>
+            <a:avLst/>
+            <a:gdLst/>
+            <a:ahLst/>
+            <a:cxnLst/>
+            <a:rect r="r" b="b" t="t" l="l"/>
+            <a:pathLst>
+              <a:path h="1205222" w="12855703">
+                <a:moveTo>
+                  <a:pt x="0" y="0"/>
+                </a:moveTo>
+                <a:lnTo>
+                  <a:pt x="12855703" y="0"/>
+                </a:lnTo>
+                <a:lnTo>
+                  <a:pt x="12855703" y="1205222"/>
+                </a:lnTo>
+                <a:lnTo>
+                  <a:pt x="0" y="1205222"/>
+                </a:lnTo>
+                <a:lnTo>
+                  <a:pt x="0" y="0"/>
+                </a:lnTo>
+                <a:close/>
+              </a:path>
+            </a:pathLst>
+          </a:custGeom>
+          <a:blipFill>
+            <a:blip r:embed="rId3"/>
+            <a:stretch>
+              <a:fillRect l="0" t="0" r="0" b="0"/>
+            </a:stretch>
+          </a:blipFill>
+        </p:spPr>
+      </p:sp>
+      <p:sp>
+        <p:nvSpPr>
+          <p:cNvPr name="Freeform 5" id="5"/>
+          <p:cNvSpPr/>
+          <p:nvPr/>
+        </p:nvSpPr>
+        <p:spPr>
+          <a:xfrm flipH="false" flipV="false" rot="0">
+            <a:off x="2932165" y="4643074"/>
+            <a:ext cx="12855703" cy="3165717"/>
+          </a:xfrm>
+          <a:custGeom>
+            <a:avLst/>
+            <a:gdLst/>
+            <a:ahLst/>
+            <a:cxnLst/>
+            <a:rect r="r" b="b" t="t" l="l"/>
+            <a:pathLst>
+              <a:path h="3165717" w="12855703">
+                <a:moveTo>
+                  <a:pt x="0" y="0"/>
+                </a:moveTo>
+                <a:lnTo>
+                  <a:pt x="12855703" y="0"/>
+                </a:lnTo>
+                <a:lnTo>
+                  <a:pt x="12855703" y="3165717"/>
+                </a:lnTo>
+                <a:lnTo>
+                  <a:pt x="0" y="3165717"/>
+                </a:lnTo>
+                <a:lnTo>
+                  <a:pt x="0" y="0"/>
+                </a:lnTo>
+                <a:close/>
+              </a:path>
+            </a:pathLst>
+          </a:custGeom>
+          <a:blipFill>
+            <a:blip r:embed="rId4"/>
+            <a:stretch>
+              <a:fillRect l="0" t="0" r="0" b="0"/>
+            </a:stretch>
+          </a:blipFill>
+        </p:spPr>
+      </p:sp>
+      <p:sp>
+        <p:nvSpPr>
+          <p:cNvPr name="TextBox 6" id="6"/>
+          <p:cNvSpPr txBox="true"/>
+          <p:nvPr/>
+        </p:nvSpPr>
+        <p:spPr>
+          <a:xfrm rot="0">
+            <a:off x="2789295" y="528002"/>
+            <a:ext cx="10091598" cy="896620"/>
+          </a:xfrm>
+          <a:prstGeom prst="rect">
+            <a:avLst/>
+          </a:prstGeom>
+        </p:spPr>
+        <p:txBody>
+          <a:bodyPr anchor="t" rtlCol="false" tIns="0" lIns="0" bIns="0" rIns="0">
+            <a:spAutoFit/>
+          </a:bodyPr>
+          <a:lstStyle/>
+          <a:p>
+            <a:pPr algn="ctr">
+              <a:lnSpc>
+                <a:spcPts val="7279"/>
+              </a:lnSpc>
+            </a:pPr>
+            <a:r>
+              <a:rPr lang="en-US" sz="5199">
+                <a:solidFill>
+                  <a:srgbClr val="000000"/>
+                </a:solidFill>
+                <a:latin typeface="Bree Serif"/>
+                <a:ea typeface="Bree Serif"/>
+                <a:cs typeface="Bree Serif"/>
+                <a:sym typeface="Bree Serif"/>
+              </a:rPr>
+              <a:t>Tabelas - Item Condicional</a:t>
             </a:r>
           </a:p>
         </p:txBody>

--- a/Monamu_Slides.pptx
+++ b/Monamu_Slides.pptx
@@ -18,25 +18,29 @@
     <p:sldId id="266" r:id="rId16"/>
     <p:sldId id="267" r:id="rId17"/>
     <p:sldId id="268" r:id="rId18"/>
+    <p:sldId id="269" r:id="rId19"/>
+    <p:sldId id="270" r:id="rId20"/>
+    <p:sldId id="271" r:id="rId21"/>
+    <p:sldId id="272" r:id="rId22"/>
   </p:sldIdLst>
   <p:sldSz cx="18288000" cy="10287000"/>
   <p:notesSz cx="6858000" cy="9144000"/>
   <p:embeddedFontLst>
     <p:embeddedFont>
       <p:font typeface="Open Sans Bold" charset="1" panose="020B0806030504020204"/>
-      <p:regular r:id="rId19"/>
+      <p:regular r:id="rId23"/>
     </p:embeddedFont>
     <p:embeddedFont>
       <p:font typeface="Open Sans" charset="1" panose="020B0606030504020204"/>
-      <p:regular r:id="rId20"/>
+      <p:regular r:id="rId24"/>
     </p:embeddedFont>
     <p:embeddedFont>
       <p:font typeface="Bree Serif" charset="1" panose="02000503040000020004"/>
-      <p:regular r:id="rId21"/>
+      <p:regular r:id="rId25"/>
     </p:embeddedFont>
     <p:embeddedFont>
       <p:font typeface="Arimo Bold" charset="1" panose="020B0704020202020204"/>
-      <p:regular r:id="rId22"/>
+      <p:regular r:id="rId26"/>
     </p:embeddedFont>
   </p:embeddedFontLst>
   <p:defaultTextStyle>
@@ -4280,6 +4284,986 @@
 </p:sld>
 </file>
 
+<file path=ppt/slides/slide14.xml><?xml version="1.0" encoding="utf-8"?>
+<p:sld xmlns:p="http://schemas.openxmlformats.org/presentationml/2006/main" xmlns:a="http://schemas.openxmlformats.org/drawingml/2006/main" xmlns:r="http://schemas.openxmlformats.org/officeDocument/2006/relationships">
+  <p:cSld>
+    <p:bg>
+      <p:bgPr>
+        <a:solidFill>
+          <a:srgbClr val="569076"/>
+        </a:solidFill>
+      </p:bgPr>
+    </p:bg>
+    <p:spTree>
+      <p:nvGrpSpPr>
+        <p:cNvPr id="1" name=""/>
+        <p:cNvGrpSpPr/>
+        <p:nvPr/>
+      </p:nvGrpSpPr>
+      <p:grpSpPr>
+        <a:xfrm>
+          <a:off x="0" y="0"/>
+          <a:ext cx="0" cy="0"/>
+          <a:chOff x="0" y="0"/>
+          <a:chExt cx="0" cy="0"/>
+        </a:xfrm>
+      </p:grpSpPr>
+      <p:sp>
+        <p:nvSpPr>
+          <p:cNvPr name="AutoShape 2" id="2"/>
+          <p:cNvSpPr/>
+          <p:nvPr/>
+        </p:nvSpPr>
+        <p:spPr>
+          <a:xfrm>
+            <a:off x="1028700" y="1969856"/>
+            <a:ext cx="16230600" cy="0"/>
+          </a:xfrm>
+          <a:prstGeom prst="line">
+            <a:avLst/>
+          </a:prstGeom>
+          <a:ln cap="flat" w="9525">
+            <a:solidFill>
+              <a:srgbClr val="000000"/>
+            </a:solidFill>
+            <a:prstDash val="solid"/>
+            <a:headEnd type="none" len="sm" w="sm"/>
+            <a:tailEnd type="none" len="sm" w="sm"/>
+          </a:ln>
+        </p:spPr>
+      </p:sp>
+      <p:sp>
+        <p:nvSpPr>
+          <p:cNvPr name="Freeform 3" id="3"/>
+          <p:cNvSpPr/>
+          <p:nvPr/>
+        </p:nvSpPr>
+        <p:spPr>
+          <a:xfrm flipH="false" flipV="false" rot="0">
+            <a:off x="2789295" y="103619"/>
+            <a:ext cx="800785" cy="1866237"/>
+          </a:xfrm>
+          <a:custGeom>
+            <a:avLst/>
+            <a:gdLst/>
+            <a:ahLst/>
+            <a:cxnLst/>
+            <a:rect r="r" b="b" t="t" l="l"/>
+            <a:pathLst>
+              <a:path h="1866237" w="800785">
+                <a:moveTo>
+                  <a:pt x="0" y="0"/>
+                </a:moveTo>
+                <a:lnTo>
+                  <a:pt x="800785" y="0"/>
+                </a:lnTo>
+                <a:lnTo>
+                  <a:pt x="800785" y="1866237"/>
+                </a:lnTo>
+                <a:lnTo>
+                  <a:pt x="0" y="1866237"/>
+                </a:lnTo>
+                <a:lnTo>
+                  <a:pt x="0" y="0"/>
+                </a:lnTo>
+                <a:close/>
+              </a:path>
+            </a:pathLst>
+          </a:custGeom>
+          <a:blipFill>
+            <a:blip r:embed="rId2">
+              <a:extLst>
+                <a:ext uri="{96DAC541-7B7A-43D3-8B79-37D633B846F1}">
+                  <asvg:svgBlip xmlns:asvg="http://schemas.microsoft.com/office/drawing/2016/SVG/main" r:embed="rId3"/>
+                </a:ext>
+              </a:extLst>
+            </a:blip>
+            <a:stretch>
+              <a:fillRect l="0" t="0" r="0" b="0"/>
+            </a:stretch>
+          </a:blipFill>
+        </p:spPr>
+      </p:sp>
+      <p:sp>
+        <p:nvSpPr>
+          <p:cNvPr name="Freeform 4" id="4"/>
+          <p:cNvSpPr/>
+          <p:nvPr/>
+        </p:nvSpPr>
+        <p:spPr>
+          <a:xfrm flipH="false" flipV="false" rot="0">
+            <a:off x="546529" y="3927728"/>
+            <a:ext cx="17194942" cy="5738102"/>
+          </a:xfrm>
+          <a:custGeom>
+            <a:avLst/>
+            <a:gdLst/>
+            <a:ahLst/>
+            <a:cxnLst/>
+            <a:rect r="r" b="b" t="t" l="l"/>
+            <a:pathLst>
+              <a:path h="5738102" w="17194942">
+                <a:moveTo>
+                  <a:pt x="0" y="0"/>
+                </a:moveTo>
+                <a:lnTo>
+                  <a:pt x="17194942" y="0"/>
+                </a:lnTo>
+                <a:lnTo>
+                  <a:pt x="17194942" y="5738102"/>
+                </a:lnTo>
+                <a:lnTo>
+                  <a:pt x="0" y="5738102"/>
+                </a:lnTo>
+                <a:lnTo>
+                  <a:pt x="0" y="0"/>
+                </a:lnTo>
+                <a:close/>
+              </a:path>
+            </a:pathLst>
+          </a:custGeom>
+          <a:blipFill>
+            <a:blip r:embed="rId4"/>
+            <a:stretch>
+              <a:fillRect l="0" t="-1885" r="0" b="0"/>
+            </a:stretch>
+          </a:blipFill>
+        </p:spPr>
+      </p:sp>
+      <p:sp>
+        <p:nvSpPr>
+          <p:cNvPr name="TextBox 5" id="5"/>
+          <p:cNvSpPr txBox="true"/>
+          <p:nvPr/>
+        </p:nvSpPr>
+        <p:spPr>
+          <a:xfrm rot="0">
+            <a:off x="2387270" y="528002"/>
+            <a:ext cx="7064586" cy="896620"/>
+          </a:xfrm>
+          <a:prstGeom prst="rect">
+            <a:avLst/>
+          </a:prstGeom>
+        </p:spPr>
+        <p:txBody>
+          <a:bodyPr anchor="t" rtlCol="false" tIns="0" lIns="0" bIns="0" rIns="0">
+            <a:spAutoFit/>
+          </a:bodyPr>
+          <a:lstStyle/>
+          <a:p>
+            <a:pPr algn="ctr">
+              <a:lnSpc>
+                <a:spcPts val="7279"/>
+              </a:lnSpc>
+            </a:pPr>
+            <a:r>
+              <a:rPr lang="en-US" sz="5199">
+                <a:solidFill>
+                  <a:srgbClr val="000000"/>
+                </a:solidFill>
+                <a:latin typeface="Bree Serif"/>
+                <a:ea typeface="Bree Serif"/>
+                <a:cs typeface="Bree Serif"/>
+                <a:sym typeface="Bree Serif"/>
+              </a:rPr>
+              <a:t>Consultas</a:t>
+            </a:r>
+          </a:p>
+        </p:txBody>
+      </p:sp>
+      <p:sp>
+        <p:nvSpPr>
+          <p:cNvPr name="TextBox 6" id="6"/>
+          <p:cNvSpPr txBox="true"/>
+          <p:nvPr/>
+        </p:nvSpPr>
+        <p:spPr>
+          <a:xfrm rot="0">
+            <a:off x="2886981" y="2130096"/>
+            <a:ext cx="12514039" cy="1581150"/>
+          </a:xfrm>
+          <a:prstGeom prst="rect">
+            <a:avLst/>
+          </a:prstGeom>
+        </p:spPr>
+        <p:txBody>
+          <a:bodyPr anchor="t" rtlCol="false" tIns="0" lIns="0" bIns="0" rIns="0">
+            <a:spAutoFit/>
+          </a:bodyPr>
+          <a:lstStyle/>
+          <a:p>
+            <a:pPr algn="ctr">
+              <a:lnSpc>
+                <a:spcPts val="4200"/>
+              </a:lnSpc>
+              <a:spcBef>
+                <a:spcPct val="0"/>
+              </a:spcBef>
+            </a:pPr>
+            <a:r>
+              <a:rPr lang="en-US" sz="3000">
+                <a:solidFill>
+                  <a:srgbClr val="000000"/>
+                </a:solidFill>
+                <a:latin typeface="Bree Serif"/>
+                <a:ea typeface="Bree Serif"/>
+                <a:cs typeface="Bree Serif"/>
+                <a:sym typeface="Bree Serif"/>
+              </a:rPr>
+              <a:t>Li</a:t>
+            </a:r>
+            <a:r>
+              <a:rPr lang="en-US" sz="3000">
+                <a:solidFill>
+                  <a:srgbClr val="000000"/>
+                </a:solidFill>
+                <a:latin typeface="Bree Serif"/>
+                <a:ea typeface="Bree Serif"/>
+                <a:cs typeface="Bree Serif"/>
+                <a:sym typeface="Bree Serif"/>
+              </a:rPr>
+              <a:t>ste o nome do produto, categoria, tamanho, preço de venda e quantidade em estoque de todos os produtos disponíveis para venda. Ordene os resultados por nome do produto.</a:t>
+            </a:r>
+          </a:p>
+        </p:txBody>
+      </p:sp>
+    </p:spTree>
+  </p:cSld>
+  <p:clrMapOvr>
+    <a:masterClrMapping/>
+  </p:clrMapOvr>
+</p:sld>
+</file>
+
+<file path=ppt/slides/slide15.xml><?xml version="1.0" encoding="utf-8"?>
+<p:sld xmlns:p="http://schemas.openxmlformats.org/presentationml/2006/main" xmlns:a="http://schemas.openxmlformats.org/drawingml/2006/main" xmlns:r="http://schemas.openxmlformats.org/officeDocument/2006/relationships">
+  <p:cSld>
+    <p:bg>
+      <p:bgPr>
+        <a:solidFill>
+          <a:srgbClr val="569076"/>
+        </a:solidFill>
+      </p:bgPr>
+    </p:bg>
+    <p:spTree>
+      <p:nvGrpSpPr>
+        <p:cNvPr id="1" name=""/>
+        <p:cNvGrpSpPr/>
+        <p:nvPr/>
+      </p:nvGrpSpPr>
+      <p:grpSpPr>
+        <a:xfrm>
+          <a:off x="0" y="0"/>
+          <a:ext cx="0" cy="0"/>
+          <a:chOff x="0" y="0"/>
+          <a:chExt cx="0" cy="0"/>
+        </a:xfrm>
+      </p:grpSpPr>
+      <p:sp>
+        <p:nvSpPr>
+          <p:cNvPr name="AutoShape 2" id="2"/>
+          <p:cNvSpPr/>
+          <p:nvPr/>
+        </p:nvSpPr>
+        <p:spPr>
+          <a:xfrm>
+            <a:off x="1028700" y="1969856"/>
+            <a:ext cx="16230600" cy="0"/>
+          </a:xfrm>
+          <a:prstGeom prst="line">
+            <a:avLst/>
+          </a:prstGeom>
+          <a:ln cap="flat" w="9525">
+            <a:solidFill>
+              <a:srgbClr val="000000"/>
+            </a:solidFill>
+            <a:prstDash val="solid"/>
+            <a:headEnd type="none" len="sm" w="sm"/>
+            <a:tailEnd type="none" len="sm" w="sm"/>
+          </a:ln>
+        </p:spPr>
+      </p:sp>
+      <p:sp>
+        <p:nvSpPr>
+          <p:cNvPr name="Freeform 3" id="3"/>
+          <p:cNvSpPr/>
+          <p:nvPr/>
+        </p:nvSpPr>
+        <p:spPr>
+          <a:xfrm flipH="false" flipV="false" rot="0">
+            <a:off x="2789295" y="103619"/>
+            <a:ext cx="800785" cy="1866237"/>
+          </a:xfrm>
+          <a:custGeom>
+            <a:avLst/>
+            <a:gdLst/>
+            <a:ahLst/>
+            <a:cxnLst/>
+            <a:rect r="r" b="b" t="t" l="l"/>
+            <a:pathLst>
+              <a:path h="1866237" w="800785">
+                <a:moveTo>
+                  <a:pt x="0" y="0"/>
+                </a:moveTo>
+                <a:lnTo>
+                  <a:pt x="800785" y="0"/>
+                </a:lnTo>
+                <a:lnTo>
+                  <a:pt x="800785" y="1866237"/>
+                </a:lnTo>
+                <a:lnTo>
+                  <a:pt x="0" y="1866237"/>
+                </a:lnTo>
+                <a:lnTo>
+                  <a:pt x="0" y="0"/>
+                </a:lnTo>
+                <a:close/>
+              </a:path>
+            </a:pathLst>
+          </a:custGeom>
+          <a:blipFill>
+            <a:blip r:embed="rId2">
+              <a:extLst>
+                <a:ext uri="{96DAC541-7B7A-43D3-8B79-37D633B846F1}">
+                  <asvg:svgBlip xmlns:asvg="http://schemas.microsoft.com/office/drawing/2016/SVG/main" r:embed="rId3"/>
+                </a:ext>
+              </a:extLst>
+            </a:blip>
+            <a:stretch>
+              <a:fillRect l="0" t="0" r="0" b="0"/>
+            </a:stretch>
+          </a:blipFill>
+        </p:spPr>
+      </p:sp>
+      <p:sp>
+        <p:nvSpPr>
+          <p:cNvPr name="Freeform 4" id="4"/>
+          <p:cNvSpPr/>
+          <p:nvPr/>
+        </p:nvSpPr>
+        <p:spPr>
+          <a:xfrm flipH="false" flipV="false" rot="0">
+            <a:off x="1028700" y="4442577"/>
+            <a:ext cx="16230600" cy="3428714"/>
+          </a:xfrm>
+          <a:custGeom>
+            <a:avLst/>
+            <a:gdLst/>
+            <a:ahLst/>
+            <a:cxnLst/>
+            <a:rect r="r" b="b" t="t" l="l"/>
+            <a:pathLst>
+              <a:path h="3428714" w="16230600">
+                <a:moveTo>
+                  <a:pt x="0" y="0"/>
+                </a:moveTo>
+                <a:lnTo>
+                  <a:pt x="16230600" y="0"/>
+                </a:lnTo>
+                <a:lnTo>
+                  <a:pt x="16230600" y="3428715"/>
+                </a:lnTo>
+                <a:lnTo>
+                  <a:pt x="0" y="3428715"/>
+                </a:lnTo>
+                <a:lnTo>
+                  <a:pt x="0" y="0"/>
+                </a:lnTo>
+                <a:close/>
+              </a:path>
+            </a:pathLst>
+          </a:custGeom>
+          <a:blipFill>
+            <a:blip r:embed="rId4"/>
+            <a:stretch>
+              <a:fillRect l="0" t="0" r="0" b="0"/>
+            </a:stretch>
+          </a:blipFill>
+        </p:spPr>
+      </p:sp>
+      <p:sp>
+        <p:nvSpPr>
+          <p:cNvPr name="TextBox 5" id="5"/>
+          <p:cNvSpPr txBox="true"/>
+          <p:nvPr/>
+        </p:nvSpPr>
+        <p:spPr>
+          <a:xfrm rot="0">
+            <a:off x="2387270" y="528002"/>
+            <a:ext cx="7064586" cy="896620"/>
+          </a:xfrm>
+          <a:prstGeom prst="rect">
+            <a:avLst/>
+          </a:prstGeom>
+        </p:spPr>
+        <p:txBody>
+          <a:bodyPr anchor="t" rtlCol="false" tIns="0" lIns="0" bIns="0" rIns="0">
+            <a:spAutoFit/>
+          </a:bodyPr>
+          <a:lstStyle/>
+          <a:p>
+            <a:pPr algn="ctr">
+              <a:lnSpc>
+                <a:spcPts val="7279"/>
+              </a:lnSpc>
+            </a:pPr>
+            <a:r>
+              <a:rPr lang="en-US" sz="5199">
+                <a:solidFill>
+                  <a:srgbClr val="000000"/>
+                </a:solidFill>
+                <a:latin typeface="Bree Serif"/>
+                <a:ea typeface="Bree Serif"/>
+                <a:cs typeface="Bree Serif"/>
+                <a:sym typeface="Bree Serif"/>
+              </a:rPr>
+              <a:t>Consultas</a:t>
+            </a:r>
+          </a:p>
+        </p:txBody>
+      </p:sp>
+      <p:sp>
+        <p:nvSpPr>
+          <p:cNvPr name="TextBox 6" id="6"/>
+          <p:cNvSpPr txBox="true"/>
+          <p:nvPr/>
+        </p:nvSpPr>
+        <p:spPr>
+          <a:xfrm rot="0">
+            <a:off x="2439927" y="2318502"/>
+            <a:ext cx="13408146" cy="1581150"/>
+          </a:xfrm>
+          <a:prstGeom prst="rect">
+            <a:avLst/>
+          </a:prstGeom>
+        </p:spPr>
+        <p:txBody>
+          <a:bodyPr anchor="t" rtlCol="false" tIns="0" lIns="0" bIns="0" rIns="0">
+            <a:spAutoFit/>
+          </a:bodyPr>
+          <a:lstStyle/>
+          <a:p>
+            <a:pPr algn="ctr">
+              <a:lnSpc>
+                <a:spcPts val="4200"/>
+              </a:lnSpc>
+              <a:spcBef>
+                <a:spcPct val="0"/>
+              </a:spcBef>
+            </a:pPr>
+            <a:r>
+              <a:rPr lang="en-US" sz="3000">
+                <a:solidFill>
+                  <a:srgbClr val="000000"/>
+                </a:solidFill>
+                <a:latin typeface="Bree Serif"/>
+                <a:ea typeface="Bree Serif"/>
+                <a:cs typeface="Bree Serif"/>
+                <a:sym typeface="Bree Serif"/>
+              </a:rPr>
+              <a:t>Liste o nome do cliente, a data da compra, os produtos comprados e o valor total de cada compra. Exiba apenas as compras do cliente selecionado. Ordene pela data da compra, da mais recente para a mais antiga.</a:t>
+            </a:r>
+          </a:p>
+        </p:txBody>
+      </p:sp>
+    </p:spTree>
+  </p:cSld>
+  <p:clrMapOvr>
+    <a:masterClrMapping/>
+  </p:clrMapOvr>
+</p:sld>
+</file>
+
+<file path=ppt/slides/slide16.xml><?xml version="1.0" encoding="utf-8"?>
+<p:sld xmlns:p="http://schemas.openxmlformats.org/presentationml/2006/main" xmlns:a="http://schemas.openxmlformats.org/drawingml/2006/main" xmlns:r="http://schemas.openxmlformats.org/officeDocument/2006/relationships">
+  <p:cSld>
+    <p:bg>
+      <p:bgPr>
+        <a:solidFill>
+          <a:srgbClr val="569076"/>
+        </a:solidFill>
+      </p:bgPr>
+    </p:bg>
+    <p:spTree>
+      <p:nvGrpSpPr>
+        <p:cNvPr id="1" name=""/>
+        <p:cNvGrpSpPr/>
+        <p:nvPr/>
+      </p:nvGrpSpPr>
+      <p:grpSpPr>
+        <a:xfrm>
+          <a:off x="0" y="0"/>
+          <a:ext cx="0" cy="0"/>
+          <a:chOff x="0" y="0"/>
+          <a:chExt cx="0" cy="0"/>
+        </a:xfrm>
+      </p:grpSpPr>
+      <p:sp>
+        <p:nvSpPr>
+          <p:cNvPr name="AutoShape 2" id="2"/>
+          <p:cNvSpPr/>
+          <p:nvPr/>
+        </p:nvSpPr>
+        <p:spPr>
+          <a:xfrm>
+            <a:off x="1028700" y="1969856"/>
+            <a:ext cx="16230600" cy="0"/>
+          </a:xfrm>
+          <a:prstGeom prst="line">
+            <a:avLst/>
+          </a:prstGeom>
+          <a:ln cap="flat" w="9525">
+            <a:solidFill>
+              <a:srgbClr val="000000"/>
+            </a:solidFill>
+            <a:prstDash val="solid"/>
+            <a:headEnd type="none" len="sm" w="sm"/>
+            <a:tailEnd type="none" len="sm" w="sm"/>
+          </a:ln>
+        </p:spPr>
+      </p:sp>
+      <p:sp>
+        <p:nvSpPr>
+          <p:cNvPr name="Freeform 3" id="3"/>
+          <p:cNvSpPr/>
+          <p:nvPr/>
+        </p:nvSpPr>
+        <p:spPr>
+          <a:xfrm flipH="false" flipV="false" rot="0">
+            <a:off x="2789295" y="103619"/>
+            <a:ext cx="800785" cy="1866237"/>
+          </a:xfrm>
+          <a:custGeom>
+            <a:avLst/>
+            <a:gdLst/>
+            <a:ahLst/>
+            <a:cxnLst/>
+            <a:rect r="r" b="b" t="t" l="l"/>
+            <a:pathLst>
+              <a:path h="1866237" w="800785">
+                <a:moveTo>
+                  <a:pt x="0" y="0"/>
+                </a:moveTo>
+                <a:lnTo>
+                  <a:pt x="800785" y="0"/>
+                </a:lnTo>
+                <a:lnTo>
+                  <a:pt x="800785" y="1866237"/>
+                </a:lnTo>
+                <a:lnTo>
+                  <a:pt x="0" y="1866237"/>
+                </a:lnTo>
+                <a:lnTo>
+                  <a:pt x="0" y="0"/>
+                </a:lnTo>
+                <a:close/>
+              </a:path>
+            </a:pathLst>
+          </a:custGeom>
+          <a:blipFill>
+            <a:blip r:embed="rId2">
+              <a:extLst>
+                <a:ext uri="{96DAC541-7B7A-43D3-8B79-37D633B846F1}">
+                  <asvg:svgBlip xmlns:asvg="http://schemas.microsoft.com/office/drawing/2016/SVG/main" r:embed="rId3"/>
+                </a:ext>
+              </a:extLst>
+            </a:blip>
+            <a:stretch>
+              <a:fillRect l="0" t="0" r="0" b="0"/>
+            </a:stretch>
+          </a:blipFill>
+        </p:spPr>
+      </p:sp>
+      <p:sp>
+        <p:nvSpPr>
+          <p:cNvPr name="Freeform 4" id="4"/>
+          <p:cNvSpPr/>
+          <p:nvPr/>
+        </p:nvSpPr>
+        <p:spPr>
+          <a:xfrm flipH="false" flipV="false" rot="0">
+            <a:off x="1028700" y="4299702"/>
+            <a:ext cx="16230600" cy="4057650"/>
+          </a:xfrm>
+          <a:custGeom>
+            <a:avLst/>
+            <a:gdLst/>
+            <a:ahLst/>
+            <a:cxnLst/>
+            <a:rect r="r" b="b" t="t" l="l"/>
+            <a:pathLst>
+              <a:path h="4057650" w="16230600">
+                <a:moveTo>
+                  <a:pt x="0" y="0"/>
+                </a:moveTo>
+                <a:lnTo>
+                  <a:pt x="16230600" y="0"/>
+                </a:lnTo>
+                <a:lnTo>
+                  <a:pt x="16230600" y="4057650"/>
+                </a:lnTo>
+                <a:lnTo>
+                  <a:pt x="0" y="4057650"/>
+                </a:lnTo>
+                <a:lnTo>
+                  <a:pt x="0" y="0"/>
+                </a:lnTo>
+                <a:close/>
+              </a:path>
+            </a:pathLst>
+          </a:custGeom>
+          <a:blipFill>
+            <a:blip r:embed="rId4"/>
+            <a:stretch>
+              <a:fillRect l="0" t="0" r="0" b="0"/>
+            </a:stretch>
+          </a:blipFill>
+        </p:spPr>
+      </p:sp>
+      <p:sp>
+        <p:nvSpPr>
+          <p:cNvPr name="TextBox 5" id="5"/>
+          <p:cNvSpPr txBox="true"/>
+          <p:nvPr/>
+        </p:nvSpPr>
+        <p:spPr>
+          <a:xfrm rot="0">
+            <a:off x="2387270" y="528002"/>
+            <a:ext cx="7064586" cy="896620"/>
+          </a:xfrm>
+          <a:prstGeom prst="rect">
+            <a:avLst/>
+          </a:prstGeom>
+        </p:spPr>
+        <p:txBody>
+          <a:bodyPr anchor="t" rtlCol="false" tIns="0" lIns="0" bIns="0" rIns="0">
+            <a:spAutoFit/>
+          </a:bodyPr>
+          <a:lstStyle/>
+          <a:p>
+            <a:pPr algn="ctr">
+              <a:lnSpc>
+                <a:spcPts val="7279"/>
+              </a:lnSpc>
+            </a:pPr>
+            <a:r>
+              <a:rPr lang="en-US" sz="5199">
+                <a:solidFill>
+                  <a:srgbClr val="000000"/>
+                </a:solidFill>
+                <a:latin typeface="Bree Serif"/>
+                <a:ea typeface="Bree Serif"/>
+                <a:cs typeface="Bree Serif"/>
+                <a:sym typeface="Bree Serif"/>
+              </a:rPr>
+              <a:t>Consultas</a:t>
+            </a:r>
+          </a:p>
+        </p:txBody>
+      </p:sp>
+      <p:sp>
+        <p:nvSpPr>
+          <p:cNvPr name="TextBox 6" id="6"/>
+          <p:cNvSpPr txBox="true"/>
+          <p:nvPr/>
+        </p:nvSpPr>
+        <p:spPr>
+          <a:xfrm rot="0">
+            <a:off x="2439927" y="2318502"/>
+            <a:ext cx="13408146" cy="1581150"/>
+          </a:xfrm>
+          <a:prstGeom prst="rect">
+            <a:avLst/>
+          </a:prstGeom>
+        </p:spPr>
+        <p:txBody>
+          <a:bodyPr anchor="t" rtlCol="false" tIns="0" lIns="0" bIns="0" rIns="0">
+            <a:spAutoFit/>
+          </a:bodyPr>
+          <a:lstStyle/>
+          <a:p>
+            <a:pPr algn="ctr">
+              <a:lnSpc>
+                <a:spcPts val="4200"/>
+              </a:lnSpc>
+              <a:spcBef>
+                <a:spcPct val="0"/>
+              </a:spcBef>
+            </a:pPr>
+            <a:r>
+              <a:rPr lang="en-US" sz="3000">
+                <a:solidFill>
+                  <a:srgbClr val="000000"/>
+                </a:solidFill>
+                <a:latin typeface="Bree Serif"/>
+                <a:ea typeface="Bree Serif"/>
+                <a:cs typeface="Bree Serif"/>
+                <a:sym typeface="Bree Serif"/>
+              </a:rPr>
+              <a:t>Liste o nome do funcionário, a data da venda, os produtos vendidos e o valor total de cada venda realizada em um período definido. Ordene por nome do funcionário e, dentro do funcionário, por data da venda.</a:t>
+            </a:r>
+          </a:p>
+        </p:txBody>
+      </p:sp>
+    </p:spTree>
+  </p:cSld>
+  <p:clrMapOvr>
+    <a:masterClrMapping/>
+  </p:clrMapOvr>
+</p:sld>
+</file>
+
+<file path=ppt/slides/slide17.xml><?xml version="1.0" encoding="utf-8"?>
+<p:sld xmlns:p="http://schemas.openxmlformats.org/presentationml/2006/main" xmlns:a="http://schemas.openxmlformats.org/drawingml/2006/main" xmlns:r="http://schemas.openxmlformats.org/officeDocument/2006/relationships">
+  <p:cSld>
+    <p:bg>
+      <p:bgPr>
+        <a:solidFill>
+          <a:srgbClr val="569076"/>
+        </a:solidFill>
+      </p:bgPr>
+    </p:bg>
+    <p:spTree>
+      <p:nvGrpSpPr>
+        <p:cNvPr id="1" name=""/>
+        <p:cNvGrpSpPr/>
+        <p:nvPr/>
+      </p:nvGrpSpPr>
+      <p:grpSpPr>
+        <a:xfrm>
+          <a:off x="0" y="0"/>
+          <a:ext cx="0" cy="0"/>
+          <a:chOff x="0" y="0"/>
+          <a:chExt cx="0" cy="0"/>
+        </a:xfrm>
+      </p:grpSpPr>
+      <p:sp>
+        <p:nvSpPr>
+          <p:cNvPr name="AutoShape 2" id="2"/>
+          <p:cNvSpPr/>
+          <p:nvPr/>
+        </p:nvSpPr>
+        <p:spPr>
+          <a:xfrm>
+            <a:off x="1028700" y="1969856"/>
+            <a:ext cx="16230600" cy="0"/>
+          </a:xfrm>
+          <a:prstGeom prst="line">
+            <a:avLst/>
+          </a:prstGeom>
+          <a:ln cap="flat" w="9525">
+            <a:solidFill>
+              <a:srgbClr val="000000"/>
+            </a:solidFill>
+            <a:prstDash val="solid"/>
+            <a:headEnd type="none" len="sm" w="sm"/>
+            <a:tailEnd type="none" len="sm" w="sm"/>
+          </a:ln>
+        </p:spPr>
+      </p:sp>
+      <p:sp>
+        <p:nvSpPr>
+          <p:cNvPr name="Freeform 3" id="3"/>
+          <p:cNvSpPr/>
+          <p:nvPr/>
+        </p:nvSpPr>
+        <p:spPr>
+          <a:xfrm flipH="false" flipV="false" rot="0">
+            <a:off x="2789295" y="103619"/>
+            <a:ext cx="800785" cy="1866237"/>
+          </a:xfrm>
+          <a:custGeom>
+            <a:avLst/>
+            <a:gdLst/>
+            <a:ahLst/>
+            <a:cxnLst/>
+            <a:rect r="r" b="b" t="t" l="l"/>
+            <a:pathLst>
+              <a:path h="1866237" w="800785">
+                <a:moveTo>
+                  <a:pt x="0" y="0"/>
+                </a:moveTo>
+                <a:lnTo>
+                  <a:pt x="800785" y="0"/>
+                </a:lnTo>
+                <a:lnTo>
+                  <a:pt x="800785" y="1866237"/>
+                </a:lnTo>
+                <a:lnTo>
+                  <a:pt x="0" y="1866237"/>
+                </a:lnTo>
+                <a:lnTo>
+                  <a:pt x="0" y="0"/>
+                </a:lnTo>
+                <a:close/>
+              </a:path>
+            </a:pathLst>
+          </a:custGeom>
+          <a:blipFill>
+            <a:blip r:embed="rId2">
+              <a:extLst>
+                <a:ext uri="{96DAC541-7B7A-43D3-8B79-37D633B846F1}">
+                  <asvg:svgBlip xmlns:asvg="http://schemas.microsoft.com/office/drawing/2016/SVG/main" r:embed="rId3"/>
+                </a:ext>
+              </a:extLst>
+            </a:blip>
+            <a:stretch>
+              <a:fillRect l="0" t="0" r="0" b="0"/>
+            </a:stretch>
+          </a:blipFill>
+        </p:spPr>
+      </p:sp>
+      <p:sp>
+        <p:nvSpPr>
+          <p:cNvPr name="Freeform 4" id="4"/>
+          <p:cNvSpPr/>
+          <p:nvPr/>
+        </p:nvSpPr>
+        <p:spPr>
+          <a:xfrm flipH="false" flipV="false" rot="0">
+            <a:off x="1028700" y="4442577"/>
+            <a:ext cx="16230600" cy="3124391"/>
+          </a:xfrm>
+          <a:custGeom>
+            <a:avLst/>
+            <a:gdLst/>
+            <a:ahLst/>
+            <a:cxnLst/>
+            <a:rect r="r" b="b" t="t" l="l"/>
+            <a:pathLst>
+              <a:path h="3124391" w="16230600">
+                <a:moveTo>
+                  <a:pt x="0" y="0"/>
+                </a:moveTo>
+                <a:lnTo>
+                  <a:pt x="16230600" y="0"/>
+                </a:lnTo>
+                <a:lnTo>
+                  <a:pt x="16230600" y="3124391"/>
+                </a:lnTo>
+                <a:lnTo>
+                  <a:pt x="0" y="3124391"/>
+                </a:lnTo>
+                <a:lnTo>
+                  <a:pt x="0" y="0"/>
+                </a:lnTo>
+                <a:close/>
+              </a:path>
+            </a:pathLst>
+          </a:custGeom>
+          <a:blipFill>
+            <a:blip r:embed="rId4"/>
+            <a:stretch>
+              <a:fillRect l="0" t="0" r="0" b="0"/>
+            </a:stretch>
+          </a:blipFill>
+        </p:spPr>
+      </p:sp>
+      <p:sp>
+        <p:nvSpPr>
+          <p:cNvPr name="TextBox 5" id="5"/>
+          <p:cNvSpPr txBox="true"/>
+          <p:nvPr/>
+        </p:nvSpPr>
+        <p:spPr>
+          <a:xfrm rot="0">
+            <a:off x="2387270" y="528002"/>
+            <a:ext cx="7064586" cy="896620"/>
+          </a:xfrm>
+          <a:prstGeom prst="rect">
+            <a:avLst/>
+          </a:prstGeom>
+        </p:spPr>
+        <p:txBody>
+          <a:bodyPr anchor="t" rtlCol="false" tIns="0" lIns="0" bIns="0" rIns="0">
+            <a:spAutoFit/>
+          </a:bodyPr>
+          <a:lstStyle/>
+          <a:p>
+            <a:pPr algn="ctr">
+              <a:lnSpc>
+                <a:spcPts val="7279"/>
+              </a:lnSpc>
+            </a:pPr>
+            <a:r>
+              <a:rPr lang="en-US" sz="5199">
+                <a:solidFill>
+                  <a:srgbClr val="000000"/>
+                </a:solidFill>
+                <a:latin typeface="Bree Serif"/>
+                <a:ea typeface="Bree Serif"/>
+                <a:cs typeface="Bree Serif"/>
+                <a:sym typeface="Bree Serif"/>
+              </a:rPr>
+              <a:t>Consultas</a:t>
+            </a:r>
+          </a:p>
+        </p:txBody>
+      </p:sp>
+      <p:sp>
+        <p:nvSpPr>
+          <p:cNvPr name="TextBox 6" id="6"/>
+          <p:cNvSpPr txBox="true"/>
+          <p:nvPr/>
+        </p:nvSpPr>
+        <p:spPr>
+          <a:xfrm rot="0">
+            <a:off x="2439927" y="2318502"/>
+            <a:ext cx="13408146" cy="1581150"/>
+          </a:xfrm>
+          <a:prstGeom prst="rect">
+            <a:avLst/>
+          </a:prstGeom>
+        </p:spPr>
+        <p:txBody>
+          <a:bodyPr anchor="t" rtlCol="false" tIns="0" lIns="0" bIns="0" rIns="0">
+            <a:spAutoFit/>
+          </a:bodyPr>
+          <a:lstStyle/>
+          <a:p>
+            <a:pPr algn="ctr">
+              <a:lnSpc>
+                <a:spcPts val="4200"/>
+              </a:lnSpc>
+              <a:spcBef>
+                <a:spcPct val="0"/>
+              </a:spcBef>
+            </a:pPr>
+            <a:r>
+              <a:rPr lang="en-US" sz="3000">
+                <a:solidFill>
+                  <a:srgbClr val="000000"/>
+                </a:solidFill>
+                <a:latin typeface="Bree Serif"/>
+                <a:ea typeface="Bree Serif"/>
+                <a:cs typeface="Bree Serif"/>
+                <a:sym typeface="Bree Serif"/>
+              </a:rPr>
+              <a:t>Mo</a:t>
+            </a:r>
+            <a:r>
+              <a:rPr lang="en-US" sz="3000">
+                <a:solidFill>
+                  <a:srgbClr val="000000"/>
+                </a:solidFill>
+                <a:latin typeface="Bree Serif"/>
+                <a:ea typeface="Bree Serif"/>
+                <a:cs typeface="Bree Serif"/>
+                <a:sym typeface="Bree Serif"/>
+              </a:rPr>
+              <a:t>stre, para cada categoria de produto, a quantidade total vendida e o valor total faturado em um período definido. Liste apenas as categorias com vendas registradas e ordene pelo maior valor faturado.</a:t>
+            </a:r>
+          </a:p>
+        </p:txBody>
+      </p:sp>
+    </p:spTree>
+  </p:cSld>
+  <p:clrMapOvr>
+    <a:masterClrMapping/>
+  </p:clrMapOvr>
+</p:sld>
+</file>
+
 <file path=ppt/slides/slide2.xml><?xml version="1.0" encoding="utf-8"?>
 <p:sld xmlns:p="http://schemas.openxmlformats.org/presentationml/2006/main" xmlns:a="http://schemas.openxmlformats.org/drawingml/2006/main" xmlns:r="http://schemas.openxmlformats.org/officeDocument/2006/relationships">
   <p:cSld>
